--- a/teacher/plan/graphrag-search-flow.pptx
+++ b/teacher/plan/graphrag-search-flow.pptx
@@ -606,8 +606,8 @@
             <a:r>
               <a:rPr lang="en-US" dirty="0"/>
               <a:t>슬라이드 10: 바깥 계약: 오래 걸리는 검색은 단계 이벤트로 흘려 보냄
-v0 search()는 마지막에 dict 하나만 돌려줘서 진행 표시를 할 수 없습니다. 단계 이벤트를 내는 생성기로 바꿉니다.
-v0 답은 JSON 모드라 토큰을 흘려 보낼 수 없습니다. 답은 평문으로 흘리고 인용 검사는 끝난 뒤에 합니다.
+검색 함수가 마지막에 결과 하나만 돌려주면 진행 표시를 할 수 없습니다. 단계 이벤트를 내는 생성기로 만듭니다.
+답을 JSON 모드로 받으면 토큰을 흘려 보낼 수 없습니다. 답은 평문으로 흘리고 인용 검사는 끝난 뒤에 합니다.
 공개 mode 이름은 local, global, hybrid로 정리하고, 보고서를 뺀 비교용은 디버그 옵션으로 뺍니다.
 연결이 끊기면 진행 중인 LLM 호출을 취소합니다.
 상세 문서: https://github.com/unicorn-campus/hybrid-ai/blob/main/teacher/plan/graphrag-search-flow.md#8-바깥-계약-스택니-리뷰</a:t>
@@ -980,7 +980,7 @@
             <a:r>
               <a:rPr lang="en-US" dirty="0"/>
               <a:t>슬라이드 3: 전체 흐름: 앞단에서 조건을 고정하고, 라우터가 세 길 중 하나로 보냄
-v0는 라우터를 먼저 부르고 그 뒤에 활성 세대를 읽습니다. 플로니 리뷰에서 세대 고정을 첫 노드로 올렸습니다.
+세대 고정은 라우터보다 먼저, 첫 노드에서 합니다(플로니 리뷰). 라우터가 도는 사이에 세대가 바뀌어도 질의 전체가 같은 세대를 봅니다.
 질문 벡터는 한 번만 계산해 청크 갈래, 엔티티 갈래, 보고서 검색이 같이 씁니다.
 라우터가 답 꼴을 지키지 못하면 Local로 보냅니다. Local도 보고서를 함께 넣으므로 거시 질문을 잘못 보내도 맥락이 남습니다.
 상세 문서: https://github.com/unicorn-campus/hybrid-ai/blob/main/teacher/plan/graphrag-search-flow.md#3-전체-흐름</a:t>
@@ -1072,7 +1072,7 @@
             <a:r>
               <a:rPr lang="en-US" dirty="0"/>
               <a:t>슬라이드 4: Local Search: 세 갈래로 시작점을 찾고, 1-hop으로 넓혀 원문 위주로 답함
-v0 청크 갈래는 BM25 10개와 벡터 10개를 RRF로 합쳐 4개를 고릅니다. 리랭커를 붙이려면 고를 후보가 있어야 하므로 25개씩으로 늘립니다.
+청크 갈래는 BM25와 벡터에서 25개씩 뽑아 RRF로 합칩니다. 리랭커가 고를 후보가 충분해야 하므로 최종 개수(4 ~ 6개)보다 넉넉히 뽑습니다.
 엔티티 벡터만으로는 「한빛 가족돌봄 카드」, 「연회비 면제」처럼 낱말이 중요한 질문(Q01, Q09)의 시작점을 놓쳐 청크 갈래를 더했습니다.
 지식니 확인: 상담 청크 260개 본문에 M-1042가 한 번도 나오지 않습니다. 회원번호는 가명 id로 바꿔 메타데이터 필터로 써야 합니다.
 이름 갈래는 정식 카드명과 조항 번호처럼 정확히 같은 값이 있는 것만 맡습니다.
@@ -1165,10 +1165,10 @@
             <a:r>
               <a:rPr lang="en-US" dirty="0"/>
               <a:t>슬라이드 5: Local Search 상세: 한 번의 Cypher로 이웃, 원문, 보고서를 함께 가져옴
-발췌는 실제 소스의 줄 순서를 따르고, 긴 맵 리터럴만 {...}로 줄였습니다. ①②③ 번호와 「질문과 비슷한 이웃부터」 주석은 설명용으로 더했습니다.
+긴 맵 리터럴은 {...}로 줄였습니다. ①②③ 번호와 「질문과 비슷한 이웃부터」 주석은 설명용입니다.
 neo4j-graphrag의 VectorCypherRetriever가 벡터로 엔티티를 찾은 뒤 이 Cypher를 이어서 실행합니다. filters로 활성 세대만 봅니다.
 Microsoft 기본값은 원문 0.5, 커뮤니티 0.15이고 나머지 0.35를 엔티티와 관계 몫으로 해석했습니다. 원문에 명시된 해석은 아닙니다.
-v0는 몫 대신 건수와 글자 상한(MAX_CHUNKS 5, CHUNK_CHARS 700)으로 자릅니다. 청크 갈래 4개가 원문 칸 5개 중 4개를 먼저 차지합니다.
+원문 칸은 갈래별 최소 쿼터를 둡니다. 쿼터가 없으면 청크 갈래가 원문 칸을 먼저 다 차지해 엔티티 갈래의 원문이 빠집니다.
 상세 문서: https://github.com/unicorn-campus/hybrid-ai/blob/main/teacher/plan/graphrag-search-flow.md#4-local-search</a:t>
             </a:r>
             <a:endParaRPr lang="en-US" dirty="0"/>
@@ -1258,7 +1258,6 @@
             <a:r>
               <a:rPr lang="en-US" dirty="0"/>
               <a:t>슬라이드 6: Global Search: 관련 보고서를 묶음마다 요약하고, 점수 높은 것만 합쳐 답함
-v0는 보고서 벡터로 상위 5개를 고른 뒤 바로 답합니다. Map과 Reduce는 확장입니다.
 지식니 의견: 청크 260개, 묶음 최소 크기 3이면 보고서 수가 많지 않을 것으로 보여 전부 읽는 편이 단순하고 재현율이 높습니다. 실제 보고서 수는 재색인 뒤 확인합니다.
 Map은 보고서 묶음마다 LLM을 한 번씩 부르므로 묶음 수가 곧 비용입니다. 동시 호출은 전역 4개로 묶습니다.
 지식니 확인: 상담 그래프 스키마의 노드는 Consultation, Complaint, Proposal, ReconsiderCondition 4종이고 고객군은 없습니다.
@@ -1355,7 +1354,7 @@
 DRIFT는 후속 질문마다 중간 답을 만들지만, 이 구성은 검색만 하고 마지막에 한 번 답해 LLM 호출을 3회로 묶습니다.
 후속 질문 수는 지식니(주제당 1개, 상한 6)와 플로니(3개, 동시성 부담) 의견을 합쳐 주제당 1개, 상한 5로 정했습니다.
 예시 흐름은 설명용 가정입니다. 실제 주제와 조항은 실행 결과로 확인합니다.
-상세 문서: https://github.com/unicorn-campus/hybrid-ai/blob/main/teacher/plan/graphrag-search-flow.md#6-hybrid-search-주제-후-근거-검색-확장</a:t>
+상세 문서: https://github.com/unicorn-campus/hybrid-ai/blob/main/teacher/plan/graphrag-search-flow.md#6-hybrid-search-주제-후-근거-검색</a:t>
             </a:r>
             <a:endParaRPr lang="en-US" dirty="0"/>
           </a:p>
@@ -1535,7 +1534,7 @@
             <a:r>
               <a:rPr lang="en-US" dirty="0"/>
               <a:t>슬라이드 9: 실행 규칙과 실패 대체: 막히면 한 단계 낮춰서라도 답함
-v0 LLM 호출은 429와 5xx에서 6번까지 다시 부르고 한 번에 최대 90초를 기다립니다. 색인에는 맞지만 질의에서는 라우터 하나가 몇 분 멈출 수 있습니다.
+색인용 LLM 호출 설정(429와 5xx에서 6번까지, 한 번에 최대 90초 대기)을 질의에 그대로 쓰면 라우터 하나가 몇 분 멈출 수 있습니다.
 그래서 질의 경로는 재시도 횟수와 대기 상한을 따로 둡니다.
 Hybrid는 후속 질문 검색이 동시에 여러 개 돌므로 LLM과 Neo4j 세션의 전역 상한이 필요합니다.
 LangGraph API 이름(Send, RetryPolicy 등)은 구현 전에 공식 문서로 다시 확인합니다.
@@ -3847,7 +3846,7 @@
                 <a:ea typeface="Pretendard" pitchFamily="34" charset="-122"/>
                 <a:cs typeface="Pretendard" pitchFamily="34" charset="-120"/>
               </a:rPr>
-              <a:t>v0 코드 이름</a:t>
+              <a:t>Local과 Global의 출발점</a:t>
             </a:r>
             <a:endParaRPr lang="en-US" sz="2000" dirty="0"/>
           </a:p>
@@ -3867,7 +3866,7 @@
                 <a:ea typeface="Pretendard" pitchFamily="34" charset="-122"/>
                 <a:cs typeface="Pretendard" pitchFamily="34" charset="-120"/>
               </a:rPr>
-              <a:t>--mode hybrid가 이 장표의 Local, --mode local은 보고서를 뺀 비교용 스위치</a:t>
+              <a:t>Local은 청크와 엔티티에서, Global은 커뮤니티 보고서에서 출발함</a:t>
             </a:r>
             <a:endParaRPr lang="en-US" sz="2000" dirty="0"/>
           </a:p>
@@ -4004,7 +4003,7 @@
                 <a:ea typeface="Pretendard" pitchFamily="34" charset="-122"/>
                 <a:cs typeface="Pretendard" pitchFamily="34" charset="-120"/>
               </a:rPr>
-              <a:t>출처: hands-on/solutions/eval-set.json 25문항, teacher/graphrag/v0/graph_search.py</a:t>
+              <a:t>출처: hands-on/solutions/eval-set.json 25문항, teacher/plan/graphrag-search-flow.md 1절</a:t>
             </a:r>
             <a:endParaRPr lang="en-US" sz="1400" dirty="0"/>
           </a:p>
@@ -4246,13 +4245,12 @@
             </a:avLst>
           </a:prstGeom>
           <a:solidFill>
-            <a:srgbClr val="FFFFFF"/>
+            <a:srgbClr val="EEF3FA"/>
           </a:solidFill>
           <a:ln w="19050">
             <a:solidFill>
-              <a:srgbClr val="2E74C6"/>
+              <a:srgbClr val="1E2A5C"/>
             </a:solidFill>
-            <a:prstDash val="dash"/>
           </a:ln>
         </p:spPr>
         <p:txBody>
@@ -4274,7 +4272,7 @@
                 <a:ea typeface="Pretendard" pitchFamily="34" charset="-122"/>
                 <a:cs typeface="Pretendard" pitchFamily="34" charset="-120"/>
               </a:rPr>
-              <a:t>fallback(대체 시)</a:t>
+              <a:t>fallback</a:t>
             </a:r>
             <a:endParaRPr lang="en-US" sz="1600" dirty="0"/>
           </a:p>
@@ -4643,7 +4641,7 @@
                 <a:ea typeface="Pretendard" pitchFamily="34" charset="-122"/>
                 <a:cs typeface="Pretendard" pitchFamily="34" charset="-120"/>
               </a:rPr>
-              <a:t>warning은 아무 때나, 15초마다 heartbeat</a:t>
+              <a:t>fallback은 대체할 때만 보냄. warning은 아무 때나, 15초마다 heartbeat</a:t>
             </a:r>
             <a:endParaRPr lang="en-US" sz="1400" dirty="0"/>
           </a:p>
@@ -6793,7 +6791,7 @@
                           <a:ea typeface="Pretendard" pitchFamily="34" charset="-122"/>
                           <a:cs typeface="Pretendard" pitchFamily="34" charset="-120"/>
                         </a:rPr>
-                        <a:t>「하이브리드」 세 뜻 혼동, 구현됨과 확장 표시, 외부 수치 출처 표시</a:t>
+                        <a:t>「하이브리드」 세 뜻 혼동, 외부 수치 출처 표시</a:t>
                       </a:r>
                       <a:endParaRPr lang="en-US" sz="1500" dirty="0">
                         <a:latin typeface="Pretendard" charset="0"/>
@@ -6861,7 +6859,7 @@
                           <a:ea typeface="Pretendard" pitchFamily="34" charset="-122"/>
                           <a:cs typeface="Pretendard" pitchFamily="34" charset="-120"/>
                         </a:rPr>
-                        <a:t>1, 2장, 도식 표기</a:t>
+                        <a:t>1, 2장</a:t>
                       </a:r>
                       <a:endParaRPr lang="en-US" sz="1500" dirty="0">
                         <a:latin typeface="Pretendard" charset="0"/>
@@ -7625,7 +7623,7 @@
                 <a:ea typeface="Pretendard SemiBold" pitchFamily="34" charset="-122"/>
                 <a:cs typeface="Pretendard SemiBold" pitchFamily="34" charset="-120"/>
               </a:rPr>
-              <a:t>평가셋에 경로 라벨과 거절 지표를 먼저 넣어 v0 기준선을 잰 뒤 단계마다 같은 지표로 비교함</a:t>
+              <a:t>평가셋에 경로 라벨과 거절 지표를 먼저 넣어 기준선을 잰 뒤 단계마다 같은 지표로 비교함</a:t>
             </a:r>
             <a:endParaRPr lang="en-US" sz="1800" dirty="0"/>
           </a:p>
@@ -8696,7 +8694,7 @@
                 <a:ea typeface="Pretendard" pitchFamily="34" charset="-122"/>
                 <a:cs typeface="Pretendard" pitchFamily="34" charset="-120"/>
               </a:rPr>
-              <a:t>측정: 평가셋 경로 라벨, 원문 1600자, 거절 지표로 v0 기준선</a:t>
+              <a:t>측정: 평가셋 경로 라벨, 원문 1600자, 거절 지표로 기준선</a:t>
             </a:r>
             <a:endParaRPr lang="en-US" sz="1800" dirty="0"/>
           </a:p>
@@ -11097,13 +11095,9 @@
             </a:avLst>
           </a:prstGeom>
           <a:solidFill>
-            <a:srgbClr val="EEF3FA"/>
+            <a:srgbClr val="1E2A5C"/>
           </a:solidFill>
-          <a:ln w="19050">
-            <a:solidFill>
-              <a:srgbClr val="1E2A5C"/>
-            </a:solidFill>
-          </a:ln>
+          <a:ln/>
         </p:spPr>
         <p:txBody>
           <a:bodyPr wrap="square" lIns="101600" tIns="63500" rIns="101600" bIns="63500" rtlCol="0" anchor="ctr"/>
@@ -11118,7 +11112,7 @@
             <a:r>
               <a:rPr lang="en-US" sz="2000" b="1" dirty="0">
                 <a:solidFill>
-                  <a:srgbClr val="1E2A5C"/>
+                  <a:srgbClr val="FFFFFF"/>
                 </a:solidFill>
                 <a:latin typeface="Pretendard" pitchFamily="34" charset="0"/>
                 <a:ea typeface="Pretendard" pitchFamily="34" charset="-122"/>
@@ -11138,7 +11132,7 @@
             <a:r>
               <a:rPr lang="en-US" sz="1700" dirty="0">
                 <a:solidFill>
-                  <a:srgbClr val="2B3242"/>
+                  <a:srgbClr val="FFFFFF"/>
                 </a:solidFill>
                 <a:latin typeface="Pretendard" pitchFamily="34" charset="0"/>
                 <a:ea typeface="Pretendard" pitchFamily="34" charset="-122"/>
@@ -11187,13 +11181,9 @@
             </a:avLst>
           </a:prstGeom>
           <a:solidFill>
-            <a:srgbClr val="EEF3FA"/>
+            <a:srgbClr val="1E2A5C"/>
           </a:solidFill>
-          <a:ln w="19050">
-            <a:solidFill>
-              <a:srgbClr val="1E2A5C"/>
-            </a:solidFill>
-          </a:ln>
+          <a:ln/>
         </p:spPr>
         <p:txBody>
           <a:bodyPr wrap="square" lIns="101600" tIns="63500" rIns="101600" bIns="63500" rtlCol="0" anchor="ctr"/>
@@ -11208,7 +11198,7 @@
             <a:r>
               <a:rPr lang="en-US" sz="2000" b="1" dirty="0">
                 <a:solidFill>
-                  <a:srgbClr val="1E2A5C"/>
+                  <a:srgbClr val="FFFFFF"/>
                 </a:solidFill>
                 <a:latin typeface="Pretendard" pitchFamily="34" charset="0"/>
                 <a:ea typeface="Pretendard" pitchFamily="34" charset="-122"/>
@@ -11228,13 +11218,13 @@
             <a:r>
               <a:rPr lang="en-US" sz="1700" dirty="0">
                 <a:solidFill>
-                  <a:srgbClr val="2B3242"/>
+                  <a:srgbClr val="FFFFFF"/>
                 </a:solidFill>
                 <a:latin typeface="Pretendard" pitchFamily="34" charset="0"/>
                 <a:ea typeface="Pretendard" pitchFamily="34" charset="-122"/>
                 <a:cs typeface="Pretendard" pitchFamily="34" charset="-120"/>
               </a:rPr>
-              <a:t>규칙 먼저, LLM이 3분류</a:t>
+              <a:t>규칙 → LLM 3분류</a:t>
             </a:r>
             <a:endParaRPr lang="en-US" sz="2000" dirty="0"/>
           </a:p>
@@ -11438,13 +11428,9 @@
             </a:avLst>
           </a:prstGeom>
           <a:solidFill>
-            <a:srgbClr val="EEF3FA"/>
+            <a:srgbClr val="1E2A5C"/>
           </a:solidFill>
-          <a:ln w="19050">
-            <a:solidFill>
-              <a:srgbClr val="1E2A5C"/>
-            </a:solidFill>
-          </a:ln>
+          <a:ln/>
         </p:spPr>
         <p:txBody>
           <a:bodyPr wrap="square" lIns="101600" tIns="63500" rIns="101600" bIns="63500" rtlCol="0" anchor="ctr"/>
@@ -11459,7 +11445,7 @@
             <a:r>
               <a:rPr lang="en-US" sz="1500" b="1" dirty="0">
                 <a:solidFill>
-                  <a:srgbClr val="1E2A5C"/>
+                  <a:srgbClr val="FFFFFF"/>
                 </a:solidFill>
                 <a:latin typeface="Pretendard" pitchFamily="34" charset="0"/>
                 <a:ea typeface="Pretendard" pitchFamily="34" charset="-122"/>
@@ -11479,7 +11465,7 @@
             <a:r>
               <a:rPr lang="en-US" sz="1400" dirty="0">
                 <a:solidFill>
-                  <a:srgbClr val="2B3242"/>
+                  <a:srgbClr val="FFFFFF"/>
                 </a:solidFill>
                 <a:latin typeface="Pretendard" pitchFamily="34" charset="0"/>
                 <a:ea typeface="Pretendard" pitchFamily="34" charset="-122"/>
@@ -11554,14 +11540,9 @@
             </a:avLst>
           </a:prstGeom>
           <a:solidFill>
-            <a:srgbClr val="FFFFFF"/>
+            <a:srgbClr val="1E2A5C"/>
           </a:solidFill>
-          <a:ln w="19050">
-            <a:solidFill>
-              <a:srgbClr val="2E74C6"/>
-            </a:solidFill>
-            <a:prstDash val="dash"/>
-          </a:ln>
+          <a:ln/>
         </p:spPr>
         <p:txBody>
           <a:bodyPr wrap="square" lIns="101600" tIns="63500" rIns="101600" bIns="63500" rtlCol="0" anchor="ctr"/>
@@ -11576,7 +11557,7 @@
             <a:r>
               <a:rPr lang="en-US" sz="1500" b="1" dirty="0">
                 <a:solidFill>
-                  <a:srgbClr val="1E2A5C"/>
+                  <a:srgbClr val="FFFFFF"/>
                 </a:solidFill>
                 <a:latin typeface="Pretendard" pitchFamily="34" charset="0"/>
                 <a:ea typeface="Pretendard" pitchFamily="34" charset="-122"/>
@@ -11596,7 +11577,7 @@
             <a:r>
               <a:rPr lang="en-US" sz="1400" dirty="0">
                 <a:solidFill>
-                  <a:srgbClr val="2B3242"/>
+                  <a:srgbClr val="FFFFFF"/>
                 </a:solidFill>
                 <a:latin typeface="Pretendard" pitchFamily="34" charset="0"/>
                 <a:ea typeface="Pretendard" pitchFamily="34" charset="-122"/>
@@ -11691,13 +11672,9 @@
             </a:avLst>
           </a:prstGeom>
           <a:solidFill>
-            <a:srgbClr val="EEF3FA"/>
+            <a:srgbClr val="1E2A5C"/>
           </a:solidFill>
-          <a:ln w="19050">
-            <a:solidFill>
-              <a:srgbClr val="1E2A5C"/>
-            </a:solidFill>
-          </a:ln>
+          <a:ln/>
         </p:spPr>
         <p:txBody>
           <a:bodyPr wrap="square" lIns="101600" tIns="63500" rIns="101600" bIns="63500" rtlCol="0" anchor="ctr"/>
@@ -11712,7 +11689,7 @@
             <a:r>
               <a:rPr lang="en-US" sz="2000" b="1" dirty="0">
                 <a:solidFill>
-                  <a:srgbClr val="1E2A5C"/>
+                  <a:srgbClr val="FFFFFF"/>
                 </a:solidFill>
                 <a:latin typeface="Pretendard" pitchFamily="34" charset="0"/>
                 <a:ea typeface="Pretendard" pitchFamily="34" charset="-122"/>
@@ -11732,7 +11709,7 @@
             <a:r>
               <a:rPr lang="en-US" sz="1700" dirty="0">
                 <a:solidFill>
-                  <a:srgbClr val="2B3242"/>
+                  <a:srgbClr val="FFFFFF"/>
                 </a:solidFill>
                 <a:latin typeface="Pretendard" pitchFamily="34" charset="0"/>
                 <a:ea typeface="Pretendard" pitchFamily="34" charset="-122"/>
@@ -11768,8 +11745,7 @@
               <a:tblPr/>
               <a:tblGrid>
                 <a:gridCol w="2377440"/>
-                <a:gridCol w="8778240"/>
-                <a:gridCol w="2468880"/>
+                <a:gridCol w="11247120"/>
               </a:tblGrid>
               <a:tr h="384048">
                 <a:tc>
@@ -11858,74 +11834,6 @@
                           <a:cs typeface="Pretendard" pitchFamily="34" charset="-120"/>
                         </a:rPr>
                         <a:t>하는 일</a:t>
-                      </a:r>
-                      <a:endParaRPr lang="en-US" sz="1500" dirty="0">
-                        <a:latin typeface="Pretendard" charset="0"/>
-                        <a:ea typeface="Pretendard" charset="0"/>
-                        <a:cs typeface="Pretendard" charset="0"/>
-                      </a:endParaRPr>
-                    </a:p>
-                  </a:txBody>
-                  <a:tcPr marL="91440" marR="91440" marT="36576" marB="36576" anchor="ctr">
-                    <a:lnL w="12700" cap="flat" cmpd="sng" algn="ctr">
-                      <a:solidFill>
-                        <a:srgbClr val="EDF0F6"/>
-                      </a:solidFill>
-                      <a:prstDash val="solid"/>
-                      <a:round/>
-                      <a:headEnd type="none" w="med" len="med"/>
-                      <a:tailEnd type="none" w="med" len="med"/>
-                    </a:lnL>
-                    <a:lnR w="12700" cap="flat" cmpd="sng" algn="ctr">
-                      <a:solidFill>
-                        <a:srgbClr val="EDF0F6"/>
-                      </a:solidFill>
-                      <a:prstDash val="solid"/>
-                      <a:round/>
-                      <a:headEnd type="none" w="med" len="med"/>
-                      <a:tailEnd type="none" w="med" len="med"/>
-                    </a:lnR>
-                    <a:lnT w="12700" cap="flat" cmpd="sng" algn="ctr">
-                      <a:solidFill>
-                        <a:srgbClr val="EDF0F6"/>
-                      </a:solidFill>
-                      <a:prstDash val="solid"/>
-                      <a:round/>
-                      <a:headEnd type="none" w="med" len="med"/>
-                      <a:tailEnd type="none" w="med" len="med"/>
-                    </a:lnT>
-                    <a:lnB w="12700" cap="flat" cmpd="sng" algn="ctr">
-                      <a:solidFill>
-                        <a:srgbClr val="EDF0F6"/>
-                      </a:solidFill>
-                      <a:prstDash val="solid"/>
-                      <a:round/>
-                      <a:headEnd type="none" w="med" len="med"/>
-                      <a:tailEnd type="none" w="med" len="med"/>
-                    </a:lnB>
-                    <a:solidFill>
-                      <a:srgbClr val="E2EEF9"/>
-                    </a:solidFill>
-                  </a:tcPr>
-                </a:tc>
-                <a:tc>
-                  <a:txBody>
-                    <a:bodyPr/>
-                    <a:lstStyle/>
-                    <a:p>
-                      <a:pPr indent="0" marL="0">
-                        <a:buNone/>
-                      </a:pPr>
-                      <a:r>
-                        <a:rPr lang="en-US" sz="1500" b="1" dirty="0">
-                          <a:solidFill>
-                            <a:srgbClr val="1E2A5C"/>
-                          </a:solidFill>
-                          <a:latin typeface="Pretendard" pitchFamily="34" charset="0"/>
-                          <a:ea typeface="Pretendard" pitchFamily="34" charset="-122"/>
-                          <a:cs typeface="Pretendard" pitchFamily="34" charset="-120"/>
-                        </a:rPr>
-                        <a:t>상태</a:t>
                       </a:r>
                       <a:endParaRPr lang="en-US" sz="1500" dirty="0">
                         <a:latin typeface="Pretendard" charset="0"/>
@@ -12114,74 +12022,6 @@
                     </a:solidFill>
                   </a:tcPr>
                 </a:tc>
-                <a:tc>
-                  <a:txBody>
-                    <a:bodyPr/>
-                    <a:lstStyle/>
-                    <a:p>
-                      <a:pPr indent="0" marL="0">
-                        <a:buNone/>
-                      </a:pPr>
-                      <a:r>
-                        <a:rPr lang="en-US" sz="1500" dirty="0">
-                          <a:solidFill>
-                            <a:srgbClr val="2B3242"/>
-                          </a:solidFill>
-                          <a:latin typeface="Pretendard" pitchFamily="34" charset="0"/>
-                          <a:ea typeface="Pretendard" pitchFamily="34" charset="-122"/>
-                          <a:cs typeface="Pretendard" pitchFamily="34" charset="-120"/>
-                        </a:rPr>
-                        <a:t>확장</a:t>
-                      </a:r>
-                      <a:endParaRPr lang="en-US" sz="1500" dirty="0">
-                        <a:latin typeface="Pretendard" charset="0"/>
-                        <a:ea typeface="Pretendard" charset="0"/>
-                        <a:cs typeface="Pretendard" charset="0"/>
-                      </a:endParaRPr>
-                    </a:p>
-                  </a:txBody>
-                  <a:tcPr marL="91440" marR="91440" marT="36576" marB="36576" anchor="ctr">
-                    <a:lnL w="12700" cap="flat" cmpd="sng" algn="ctr">
-                      <a:solidFill>
-                        <a:srgbClr val="EDF0F6"/>
-                      </a:solidFill>
-                      <a:prstDash val="solid"/>
-                      <a:round/>
-                      <a:headEnd type="none" w="med" len="med"/>
-                      <a:tailEnd type="none" w="med" len="med"/>
-                    </a:lnL>
-                    <a:lnR w="12700" cap="flat" cmpd="sng" algn="ctr">
-                      <a:solidFill>
-                        <a:srgbClr val="EDF0F6"/>
-                      </a:solidFill>
-                      <a:prstDash val="solid"/>
-                      <a:round/>
-                      <a:headEnd type="none" w="med" len="med"/>
-                      <a:tailEnd type="none" w="med" len="med"/>
-                    </a:lnR>
-                    <a:lnT w="12700" cap="flat" cmpd="sng" algn="ctr">
-                      <a:solidFill>
-                        <a:srgbClr val="EDF0F6"/>
-                      </a:solidFill>
-                      <a:prstDash val="solid"/>
-                      <a:round/>
-                      <a:headEnd type="none" w="med" len="med"/>
-                      <a:tailEnd type="none" w="med" len="med"/>
-                    </a:lnT>
-                    <a:lnB w="12700" cap="flat" cmpd="sng" algn="ctr">
-                      <a:solidFill>
-                        <a:srgbClr val="EDF0F6"/>
-                      </a:solidFill>
-                      <a:prstDash val="solid"/>
-                      <a:round/>
-                      <a:headEnd type="none" w="med" len="med"/>
-                      <a:tailEnd type="none" w="med" len="med"/>
-                    </a:lnB>
-                    <a:solidFill>
-                      <a:srgbClr val="FFFFFF"/>
-                    </a:solidFill>
-                  </a:tcPr>
-                </a:tc>
               </a:tr>
               <a:tr h="438912">
                 <a:tc>
@@ -12270,74 +12110,6 @@
                           <a:cs typeface="Pretendard" pitchFamily="34" charset="-120"/>
                         </a:rPr>
                         <a:t>Local 45초, Global 90초, Hybrid 150초. 넘으면 모은 근거로 부분 답</a:t>
-                      </a:r>
-                      <a:endParaRPr lang="en-US" sz="1500" dirty="0">
-                        <a:latin typeface="Pretendard" charset="0"/>
-                        <a:ea typeface="Pretendard" charset="0"/>
-                        <a:cs typeface="Pretendard" charset="0"/>
-                      </a:endParaRPr>
-                    </a:p>
-                  </a:txBody>
-                  <a:tcPr marL="91440" marR="91440" marT="36576" marB="36576" anchor="ctr">
-                    <a:lnL w="12700" cap="flat" cmpd="sng" algn="ctr">
-                      <a:solidFill>
-                        <a:srgbClr val="EDF0F6"/>
-                      </a:solidFill>
-                      <a:prstDash val="solid"/>
-                      <a:round/>
-                      <a:headEnd type="none" w="med" len="med"/>
-                      <a:tailEnd type="none" w="med" len="med"/>
-                    </a:lnL>
-                    <a:lnR w="12700" cap="flat" cmpd="sng" algn="ctr">
-                      <a:solidFill>
-                        <a:srgbClr val="EDF0F6"/>
-                      </a:solidFill>
-                      <a:prstDash val="solid"/>
-                      <a:round/>
-                      <a:headEnd type="none" w="med" len="med"/>
-                      <a:tailEnd type="none" w="med" len="med"/>
-                    </a:lnR>
-                    <a:lnT w="12700" cap="flat" cmpd="sng" algn="ctr">
-                      <a:solidFill>
-                        <a:srgbClr val="EDF0F6"/>
-                      </a:solidFill>
-                      <a:prstDash val="solid"/>
-                      <a:round/>
-                      <a:headEnd type="none" w="med" len="med"/>
-                      <a:tailEnd type="none" w="med" len="med"/>
-                    </a:lnT>
-                    <a:lnB w="12700" cap="flat" cmpd="sng" algn="ctr">
-                      <a:solidFill>
-                        <a:srgbClr val="EDF0F6"/>
-                      </a:solidFill>
-                      <a:prstDash val="solid"/>
-                      <a:round/>
-                      <a:headEnd type="none" w="med" len="med"/>
-                      <a:tailEnd type="none" w="med" len="med"/>
-                    </a:lnB>
-                    <a:solidFill>
-                      <a:srgbClr val="F5F8FC"/>
-                    </a:solidFill>
-                  </a:tcPr>
-                </a:tc>
-                <a:tc>
-                  <a:txBody>
-                    <a:bodyPr/>
-                    <a:lstStyle/>
-                    <a:p>
-                      <a:pPr indent="0" marL="0">
-                        <a:buNone/>
-                      </a:pPr>
-                      <a:r>
-                        <a:rPr lang="en-US" sz="1500" dirty="0">
-                          <a:solidFill>
-                            <a:srgbClr val="2B3242"/>
-                          </a:solidFill>
-                          <a:latin typeface="Pretendard" pitchFamily="34" charset="0"/>
-                          <a:ea typeface="Pretendard" pitchFamily="34" charset="-122"/>
-                          <a:cs typeface="Pretendard" pitchFamily="34" charset="-120"/>
-                        </a:rPr>
-                        <a:t>확장</a:t>
                       </a:r>
                       <a:endParaRPr lang="en-US" sz="1500" dirty="0">
                         <a:latin typeface="Pretendard" charset="0"/>
@@ -12526,74 +12298,6 @@
                     </a:solidFill>
                   </a:tcPr>
                 </a:tc>
-                <a:tc>
-                  <a:txBody>
-                    <a:bodyPr/>
-                    <a:lstStyle/>
-                    <a:p>
-                      <a:pPr indent="0" marL="0">
-                        <a:buNone/>
-                      </a:pPr>
-                      <a:r>
-                        <a:rPr lang="en-US" sz="1500" dirty="0">
-                          <a:solidFill>
-                            <a:srgbClr val="2B3242"/>
-                          </a:solidFill>
-                          <a:latin typeface="Pretendard" pitchFamily="34" charset="0"/>
-                          <a:ea typeface="Pretendard" pitchFamily="34" charset="-122"/>
-                          <a:cs typeface="Pretendard" pitchFamily="34" charset="-120"/>
-                        </a:rPr>
-                        <a:t>확장</a:t>
-                      </a:r>
-                      <a:endParaRPr lang="en-US" sz="1500" dirty="0">
-                        <a:latin typeface="Pretendard" charset="0"/>
-                        <a:ea typeface="Pretendard" charset="0"/>
-                        <a:cs typeface="Pretendard" charset="0"/>
-                      </a:endParaRPr>
-                    </a:p>
-                  </a:txBody>
-                  <a:tcPr marL="91440" marR="91440" marT="36576" marB="36576" anchor="ctr">
-                    <a:lnL w="12700" cap="flat" cmpd="sng" algn="ctr">
-                      <a:solidFill>
-                        <a:srgbClr val="EDF0F6"/>
-                      </a:solidFill>
-                      <a:prstDash val="solid"/>
-                      <a:round/>
-                      <a:headEnd type="none" w="med" len="med"/>
-                      <a:tailEnd type="none" w="med" len="med"/>
-                    </a:lnL>
-                    <a:lnR w="12700" cap="flat" cmpd="sng" algn="ctr">
-                      <a:solidFill>
-                        <a:srgbClr val="EDF0F6"/>
-                      </a:solidFill>
-                      <a:prstDash val="solid"/>
-                      <a:round/>
-                      <a:headEnd type="none" w="med" len="med"/>
-                      <a:tailEnd type="none" w="med" len="med"/>
-                    </a:lnR>
-                    <a:lnT w="12700" cap="flat" cmpd="sng" algn="ctr">
-                      <a:solidFill>
-                        <a:srgbClr val="EDF0F6"/>
-                      </a:solidFill>
-                      <a:prstDash val="solid"/>
-                      <a:round/>
-                      <a:headEnd type="none" w="med" len="med"/>
-                      <a:tailEnd type="none" w="med" len="med"/>
-                    </a:lnT>
-                    <a:lnB w="12700" cap="flat" cmpd="sng" algn="ctr">
-                      <a:solidFill>
-                        <a:srgbClr val="EDF0F6"/>
-                      </a:solidFill>
-                      <a:prstDash val="solid"/>
-                      <a:round/>
-                      <a:headEnd type="none" w="med" len="med"/>
-                      <a:tailEnd type="none" w="med" len="med"/>
-                    </a:lnB>
-                    <a:solidFill>
-                      <a:srgbClr val="FFFFFF"/>
-                    </a:solidFill>
-                  </a:tcPr>
-                </a:tc>
               </a:tr>
               <a:tr h="438912">
                 <a:tc>
@@ -12681,75 +12385,7 @@
                           <a:ea typeface="Pretendard" pitchFamily="34" charset="-122"/>
                           <a:cs typeface="Pretendard" pitchFamily="34" charset="-120"/>
                         </a:rPr>
-                        <a:t>v0는 LLM 2분류. 규칙 먼저 보고 LLM 3분류, 꼴 오류면 Local</a:t>
-                      </a:r>
-                      <a:endParaRPr lang="en-US" sz="1500" dirty="0">
-                        <a:latin typeface="Pretendard" charset="0"/>
-                        <a:ea typeface="Pretendard" charset="0"/>
-                        <a:cs typeface="Pretendard" charset="0"/>
-                      </a:endParaRPr>
-                    </a:p>
-                  </a:txBody>
-                  <a:tcPr marL="91440" marR="91440" marT="36576" marB="36576" anchor="ctr">
-                    <a:lnL w="12700" cap="flat" cmpd="sng" algn="ctr">
-                      <a:solidFill>
-                        <a:srgbClr val="EDF0F6"/>
-                      </a:solidFill>
-                      <a:prstDash val="solid"/>
-                      <a:round/>
-                      <a:headEnd type="none" w="med" len="med"/>
-                      <a:tailEnd type="none" w="med" len="med"/>
-                    </a:lnL>
-                    <a:lnR w="12700" cap="flat" cmpd="sng" algn="ctr">
-                      <a:solidFill>
-                        <a:srgbClr val="EDF0F6"/>
-                      </a:solidFill>
-                      <a:prstDash val="solid"/>
-                      <a:round/>
-                      <a:headEnd type="none" w="med" len="med"/>
-                      <a:tailEnd type="none" w="med" len="med"/>
-                    </a:lnR>
-                    <a:lnT w="12700" cap="flat" cmpd="sng" algn="ctr">
-                      <a:solidFill>
-                        <a:srgbClr val="EDF0F6"/>
-                      </a:solidFill>
-                      <a:prstDash val="solid"/>
-                      <a:round/>
-                      <a:headEnd type="none" w="med" len="med"/>
-                      <a:tailEnd type="none" w="med" len="med"/>
-                    </a:lnT>
-                    <a:lnB w="12700" cap="flat" cmpd="sng" algn="ctr">
-                      <a:solidFill>
-                        <a:srgbClr val="EDF0F6"/>
-                      </a:solidFill>
-                      <a:prstDash val="solid"/>
-                      <a:round/>
-                      <a:headEnd type="none" w="med" len="med"/>
-                      <a:tailEnd type="none" w="med" len="med"/>
-                    </a:lnB>
-                    <a:solidFill>
-                      <a:srgbClr val="F5F8FC"/>
-                    </a:solidFill>
-                  </a:tcPr>
-                </a:tc>
-                <a:tc>
-                  <a:txBody>
-                    <a:bodyPr/>
-                    <a:lstStyle/>
-                    <a:p>
-                      <a:pPr indent="0" marL="0">
-                        <a:buNone/>
-                      </a:pPr>
-                      <a:r>
-                        <a:rPr lang="en-US" sz="1500" dirty="0">
-                          <a:solidFill>
-                            <a:srgbClr val="2B3242"/>
-                          </a:solidFill>
-                          <a:latin typeface="Pretendard" pitchFamily="34" charset="0"/>
-                          <a:ea typeface="Pretendard" pitchFamily="34" charset="-122"/>
-                          <a:cs typeface="Pretendard" pitchFamily="34" charset="-120"/>
-                        </a:rPr>
-                        <a:t>일부 구현</a:t>
+                        <a:t>규칙 먼저 보고 LLM이 3분류(local, global, hybrid), 꼴 오류면 Local</a:t>
                       </a:r>
                       <a:endParaRPr lang="en-US" sz="1500" dirty="0">
                         <a:latin typeface="Pretendard" charset="0"/>
@@ -12938,74 +12574,6 @@
                     </a:solidFill>
                   </a:tcPr>
                 </a:tc>
-                <a:tc>
-                  <a:txBody>
-                    <a:bodyPr/>
-                    <a:lstStyle/>
-                    <a:p>
-                      <a:pPr indent="0" marL="0">
-                        <a:buNone/>
-                      </a:pPr>
-                      <a:r>
-                        <a:rPr lang="en-US" sz="1500" dirty="0">
-                          <a:solidFill>
-                            <a:srgbClr val="2B3242"/>
-                          </a:solidFill>
-                          <a:latin typeface="Pretendard" pitchFamily="34" charset="0"/>
-                          <a:ea typeface="Pretendard" pitchFamily="34" charset="-122"/>
-                          <a:cs typeface="Pretendard" pitchFamily="34" charset="-120"/>
-                        </a:rPr>
-                        <a:t>일부 구현</a:t>
-                      </a:r>
-                      <a:endParaRPr lang="en-US" sz="1500" dirty="0">
-                        <a:latin typeface="Pretendard" charset="0"/>
-                        <a:ea typeface="Pretendard" charset="0"/>
-                        <a:cs typeface="Pretendard" charset="0"/>
-                      </a:endParaRPr>
-                    </a:p>
-                  </a:txBody>
-                  <a:tcPr marL="91440" marR="91440" marT="36576" marB="36576" anchor="ctr">
-                    <a:lnL w="12700" cap="flat" cmpd="sng" algn="ctr">
-                      <a:solidFill>
-                        <a:srgbClr val="EDF0F6"/>
-                      </a:solidFill>
-                      <a:prstDash val="solid"/>
-                      <a:round/>
-                      <a:headEnd type="none" w="med" len="med"/>
-                      <a:tailEnd type="none" w="med" len="med"/>
-                    </a:lnL>
-                    <a:lnR w="12700" cap="flat" cmpd="sng" algn="ctr">
-                      <a:solidFill>
-                        <a:srgbClr val="EDF0F6"/>
-                      </a:solidFill>
-                      <a:prstDash val="solid"/>
-                      <a:round/>
-                      <a:headEnd type="none" w="med" len="med"/>
-                      <a:tailEnd type="none" w="med" len="med"/>
-                    </a:lnR>
-                    <a:lnT w="12700" cap="flat" cmpd="sng" algn="ctr">
-                      <a:solidFill>
-                        <a:srgbClr val="EDF0F6"/>
-                      </a:solidFill>
-                      <a:prstDash val="solid"/>
-                      <a:round/>
-                      <a:headEnd type="none" w="med" len="med"/>
-                      <a:tailEnd type="none" w="med" len="med"/>
-                    </a:lnT>
-                    <a:lnB w="12700" cap="flat" cmpd="sng" algn="ctr">
-                      <a:solidFill>
-                        <a:srgbClr val="EDF0F6"/>
-                      </a:solidFill>
-                      <a:prstDash val="solid"/>
-                      <a:round/>
-                      <a:headEnd type="none" w="med" len="med"/>
-                      <a:tailEnd type="none" w="med" len="med"/>
-                    </a:lnB>
-                    <a:solidFill>
-                      <a:srgbClr val="FFFFFF"/>
-                    </a:solidFill>
-                  </a:tcPr>
-                </a:tc>
               </a:tr>
             </a:tbl>
           </a:graphicData>
@@ -13014,199 +12582,6 @@
       <p:sp>
         <p:nvSpPr>
           <p:cNvPr id="24" name="Shape 21"/>
-          <p:cNvSpPr/>
-          <p:nvPr/>
-        </p:nvSpPr>
-        <p:spPr>
-          <a:xfrm>
-            <a:off x="509321" y="6894576"/>
-            <a:ext cx="384048" cy="256032"/>
-          </a:xfrm>
-          <a:prstGeom prst="roundRect">
-            <a:avLst>
-              <a:gd name="adj" fmla="val 17857"/>
-            </a:avLst>
-          </a:prstGeom>
-          <a:solidFill>
-            <a:srgbClr val="1E2A5C"/>
-          </a:solidFill>
-          <a:ln/>
-        </p:spPr>
-      </p:sp>
-      <p:sp>
-        <p:nvSpPr>
-          <p:cNvPr id="25" name="Text 22"/>
-          <p:cNvSpPr txBox="1"/>
-          <p:nvPr/>
-        </p:nvSpPr>
-        <p:spPr>
-          <a:xfrm>
-            <a:off x="984809" y="6858000"/>
-            <a:ext cx="1783080" cy="329184"/>
-          </a:xfrm>
-          <a:prstGeom prst="rect">
-            <a:avLst/>
-          </a:prstGeom>
-          <a:noFill/>
-          <a:ln/>
-        </p:spPr>
-        <p:txBody>
-          <a:bodyPr wrap="square" lIns="0" tIns="0" rIns="0" bIns="0" rtlCol="0" anchor="ctr"/>
-          <a:lstStyle/>
-          <a:p>
-            <a:pPr indent="0" marL="0">
-              <a:buNone/>
-            </a:pPr>
-            <a:r>
-              <a:rPr lang="en-US" sz="1400" dirty="0">
-                <a:solidFill>
-                  <a:srgbClr val="4A5364"/>
-                </a:solidFill>
-                <a:latin typeface="Pretendard" pitchFamily="34" charset="0"/>
-                <a:ea typeface="Pretendard" pitchFamily="34" charset="-122"/>
-                <a:cs typeface="Pretendard" pitchFamily="34" charset="-120"/>
-              </a:rPr>
-              <a:t>v0 구현됨</a:t>
-            </a:r>
-            <a:endParaRPr lang="en-US" sz="1400" dirty="0"/>
-          </a:p>
-        </p:txBody>
-      </p:sp>
-      <p:sp>
-        <p:nvSpPr>
-          <p:cNvPr id="26" name="Shape 23"/>
-          <p:cNvSpPr/>
-          <p:nvPr/>
-        </p:nvSpPr>
-        <p:spPr>
-          <a:xfrm>
-            <a:off x="2841041" y="6894576"/>
-            <a:ext cx="384048" cy="256032"/>
-          </a:xfrm>
-          <a:prstGeom prst="roundRect">
-            <a:avLst>
-              <a:gd name="adj" fmla="val 17857"/>
-            </a:avLst>
-          </a:prstGeom>
-          <a:solidFill>
-            <a:srgbClr val="EEF3FA"/>
-          </a:solidFill>
-          <a:ln w="19050">
-            <a:solidFill>
-              <a:srgbClr val="1E2A5C"/>
-            </a:solidFill>
-            <a:prstDash val="solid"/>
-          </a:ln>
-        </p:spPr>
-      </p:sp>
-      <p:sp>
-        <p:nvSpPr>
-          <p:cNvPr id="27" name="Text 24"/>
-          <p:cNvSpPr txBox="1"/>
-          <p:nvPr/>
-        </p:nvSpPr>
-        <p:spPr>
-          <a:xfrm>
-            <a:off x="3316529" y="6858000"/>
-            <a:ext cx="1783080" cy="329184"/>
-          </a:xfrm>
-          <a:prstGeom prst="rect">
-            <a:avLst/>
-          </a:prstGeom>
-          <a:noFill/>
-          <a:ln/>
-        </p:spPr>
-        <p:txBody>
-          <a:bodyPr wrap="square" lIns="0" tIns="0" rIns="0" bIns="0" rtlCol="0" anchor="ctr"/>
-          <a:lstStyle/>
-          <a:p>
-            <a:pPr indent="0" marL="0">
-              <a:buNone/>
-            </a:pPr>
-            <a:r>
-              <a:rPr lang="en-US" sz="1400" dirty="0">
-                <a:solidFill>
-                  <a:srgbClr val="4A5364"/>
-                </a:solidFill>
-                <a:latin typeface="Pretendard" pitchFamily="34" charset="0"/>
-                <a:ea typeface="Pretendard" pitchFamily="34" charset="-122"/>
-                <a:cs typeface="Pretendard" pitchFamily="34" charset="-120"/>
-              </a:rPr>
-              <a:t>일부 구현</a:t>
-            </a:r>
-            <a:endParaRPr lang="en-US" sz="1400" dirty="0"/>
-          </a:p>
-        </p:txBody>
-      </p:sp>
-      <p:sp>
-        <p:nvSpPr>
-          <p:cNvPr id="28" name="Shape 25"/>
-          <p:cNvSpPr/>
-          <p:nvPr/>
-        </p:nvSpPr>
-        <p:spPr>
-          <a:xfrm>
-            <a:off x="5172761" y="6894576"/>
-            <a:ext cx="384048" cy="256032"/>
-          </a:xfrm>
-          <a:prstGeom prst="roundRect">
-            <a:avLst>
-              <a:gd name="adj" fmla="val 17857"/>
-            </a:avLst>
-          </a:prstGeom>
-          <a:solidFill>
-            <a:srgbClr val="FFFFFF"/>
-          </a:solidFill>
-          <a:ln w="19050">
-            <a:solidFill>
-              <a:srgbClr val="2E74C6"/>
-            </a:solidFill>
-            <a:prstDash val="dash"/>
-          </a:ln>
-        </p:spPr>
-      </p:sp>
-      <p:sp>
-        <p:nvSpPr>
-          <p:cNvPr id="29" name="Text 26"/>
-          <p:cNvSpPr txBox="1"/>
-          <p:nvPr/>
-        </p:nvSpPr>
-        <p:spPr>
-          <a:xfrm>
-            <a:off x="5648249" y="6858000"/>
-            <a:ext cx="1783080" cy="329184"/>
-          </a:xfrm>
-          <a:prstGeom prst="rect">
-            <a:avLst/>
-          </a:prstGeom>
-          <a:noFill/>
-          <a:ln/>
-        </p:spPr>
-        <p:txBody>
-          <a:bodyPr wrap="square" lIns="0" tIns="0" rIns="0" bIns="0" rtlCol="0" anchor="ctr"/>
-          <a:lstStyle/>
-          <a:p>
-            <a:pPr indent="0" marL="0">
-              <a:buNone/>
-            </a:pPr>
-            <a:r>
-              <a:rPr lang="en-US" sz="1400" dirty="0">
-                <a:solidFill>
-                  <a:srgbClr val="4A5364"/>
-                </a:solidFill>
-                <a:latin typeface="Pretendard" pitchFamily="34" charset="0"/>
-                <a:ea typeface="Pretendard" pitchFamily="34" charset="-122"/>
-                <a:cs typeface="Pretendard" pitchFamily="34" charset="-120"/>
-              </a:rPr>
-              <a:t>확장(최종안)</a:t>
-            </a:r>
-            <a:endParaRPr lang="en-US" sz="1400" dirty="0"/>
-          </a:p>
-        </p:txBody>
-      </p:sp>
-      <p:sp>
-        <p:nvSpPr>
-          <p:cNvPr id="30" name="Shape 27"/>
           <p:cNvSpPr/>
           <p:nvPr/>
         </p:nvSpPr>
@@ -13233,7 +12608,7 @@
       </p:sp>
       <p:sp>
         <p:nvSpPr>
-          <p:cNvPr id="31" name="Text 28">
+          <p:cNvPr id="25" name="Text 22">
             <a:hlinkClick r:id="rId1" tooltip=""/>
           </p:cNvPr>
           <p:cNvSpPr/>
@@ -13281,7 +12656,7 @@
       </p:sp>
       <p:sp>
         <p:nvSpPr>
-          <p:cNvPr id="32" name="Shape 29"/>
+          <p:cNvPr id="26" name="Shape 23"/>
           <p:cNvSpPr/>
           <p:nvPr/>
         </p:nvSpPr>
@@ -13304,7 +12679,7 @@
       </p:sp>
       <p:sp>
         <p:nvSpPr>
-          <p:cNvPr id="33" name="Text 30"/>
+          <p:cNvPr id="27" name="Text 24"/>
           <p:cNvSpPr txBox="1"/>
           <p:nvPr/>
         </p:nvSpPr>
@@ -13335,7 +12710,7 @@
                 <a:ea typeface="Pretendard" pitchFamily="34" charset="-122"/>
                 <a:cs typeface="Pretendard" pitchFamily="34" charset="-120"/>
               </a:rPr>
-              <a:t>출처: teacher/plan/graphrag-search-flow.md 3절, teacher/graphrag/v0/graph_search.py</a:t>
+              <a:t>출처: teacher/plan/graphrag-search-flow.md 3절</a:t>
             </a:r>
             <a:endParaRPr lang="en-US" sz="1400" dirty="0"/>
           </a:p>
@@ -13511,13 +12886,12 @@
             </a:avLst>
           </a:prstGeom>
           <a:solidFill>
-            <a:srgbClr val="FFFFFF"/>
+            <a:srgbClr val="EEF3FA"/>
           </a:solidFill>
           <a:ln w="19050">
             <a:solidFill>
-              <a:srgbClr val="2E74C6"/>
+              <a:srgbClr val="1E2A5C"/>
             </a:solidFill>
-            <a:prstDash val="dash"/>
           </a:ln>
         </p:spPr>
         <p:txBody>
@@ -13733,14 +13107,9 @@
             </a:avLst>
           </a:prstGeom>
           <a:solidFill>
-            <a:srgbClr val="FFFFFF"/>
+            <a:srgbClr val="1E2A5C"/>
           </a:solidFill>
-          <a:ln w="19050">
-            <a:solidFill>
-              <a:srgbClr val="2E74C6"/>
-            </a:solidFill>
-            <a:prstDash val="dash"/>
-          </a:ln>
+          <a:ln/>
         </p:spPr>
         <p:txBody>
           <a:bodyPr wrap="square" lIns="101600" tIns="63500" rIns="101600" bIns="63500" rtlCol="0" anchor="ctr"/>
@@ -13755,7 +13124,7 @@
             <a:r>
               <a:rPr lang="en-US" sz="1600" dirty="0">
                 <a:solidFill>
-                  <a:srgbClr val="2B3242"/>
+                  <a:srgbClr val="FFFFFF"/>
                 </a:solidFill>
                 <a:latin typeface="Pretendard" pitchFamily="34" charset="0"/>
                 <a:ea typeface="Pretendard" pitchFamily="34" charset="-122"/>
@@ -13827,7 +13196,7 @@
                 <a:ea typeface="Pretendard" pitchFamily="34" charset="-122"/>
                 <a:cs typeface="Pretendard" pitchFamily="34" charset="-120"/>
               </a:rPr>
-              <a:t>청크 4 ~ 6개 → 그 청크의 엔티티</a:t>
+              <a:t>청크 4 ~ 6개의 엔티티(FROM_CHUNK)</a:t>
             </a:r>
             <a:endParaRPr lang="en-US" sz="1600" dirty="0"/>
           </a:p>
@@ -14160,14 +13529,9 @@
             </a:avLst>
           </a:prstGeom>
           <a:solidFill>
-            <a:srgbClr val="FFFFFF"/>
+            <a:srgbClr val="1E2A5C"/>
           </a:solidFill>
-          <a:ln w="19050">
-            <a:solidFill>
-              <a:srgbClr val="2E74C6"/>
-            </a:solidFill>
-            <a:prstDash val="dash"/>
-          </a:ln>
+          <a:ln/>
         </p:spPr>
         <p:txBody>
           <a:bodyPr wrap="square" lIns="101600" tIns="63500" rIns="101600" bIns="63500" rtlCol="0" anchor="ctr"/>
@@ -14182,7 +13546,7 @@
             <a:r>
               <a:rPr lang="en-US" sz="1600" dirty="0">
                 <a:solidFill>
-                  <a:srgbClr val="2B3242"/>
+                  <a:srgbClr val="FFFFFF"/>
                 </a:solidFill>
                 <a:latin typeface="Pretendard" pitchFamily="34" charset="0"/>
                 <a:ea typeface="Pretendard" pitchFamily="34" charset="-122"/>
@@ -14231,14 +13595,9 @@
             </a:avLst>
           </a:prstGeom>
           <a:solidFill>
-            <a:srgbClr val="FFFFFF"/>
+            <a:srgbClr val="1E2A5C"/>
           </a:solidFill>
-          <a:ln w="19050">
-            <a:solidFill>
-              <a:srgbClr val="2E74C6"/>
-            </a:solidFill>
-            <a:prstDash val="dash"/>
-          </a:ln>
+          <a:ln/>
         </p:spPr>
         <p:txBody>
           <a:bodyPr wrap="square" lIns="101600" tIns="63500" rIns="101600" bIns="63500" rtlCol="0" anchor="ctr"/>
@@ -14253,7 +13612,7 @@
             <a:r>
               <a:rPr lang="en-US" sz="1600" dirty="0">
                 <a:solidFill>
-                  <a:srgbClr val="2B3242"/>
+                  <a:srgbClr val="FFFFFF"/>
                 </a:solidFill>
                 <a:latin typeface="Pretendard" pitchFamily="34" charset="0"/>
                 <a:ea typeface="Pretendard" pitchFamily="34" charset="-122"/>
@@ -14302,14 +13661,9 @@
             </a:avLst>
           </a:prstGeom>
           <a:solidFill>
-            <a:srgbClr val="FFFFFF"/>
+            <a:srgbClr val="1E2A5C"/>
           </a:solidFill>
-          <a:ln w="19050">
-            <a:solidFill>
-              <a:srgbClr val="2E74C6"/>
-            </a:solidFill>
-            <a:prstDash val="dash"/>
-          </a:ln>
+          <a:ln/>
         </p:spPr>
         <p:txBody>
           <a:bodyPr wrap="square" lIns="101600" tIns="63500" rIns="101600" bIns="63500" rtlCol="0" anchor="ctr"/>
@@ -14324,7 +13678,7 @@
             <a:r>
               <a:rPr lang="en-US" sz="1600" dirty="0">
                 <a:solidFill>
-                  <a:srgbClr val="2B3242"/>
+                  <a:srgbClr val="FFFFFF"/>
                 </a:solidFill>
                 <a:latin typeface="Pretendard" pitchFamily="34" charset="0"/>
                 <a:ea typeface="Pretendard" pitchFamily="34" charset="-122"/>
@@ -14465,13 +13819,12 @@
             </a:avLst>
           </a:prstGeom>
           <a:solidFill>
-            <a:srgbClr val="FFFFFF"/>
+            <a:srgbClr val="EEF3FA"/>
           </a:solidFill>
           <a:ln w="19050">
             <a:solidFill>
-              <a:srgbClr val="2E74C6"/>
+              <a:srgbClr val="1E2A5C"/>
             </a:solidFill>
-            <a:prstDash val="dash"/>
           </a:ln>
         </p:spPr>
         <p:txBody>
@@ -14727,199 +14080,6 @@
       <p:sp>
         <p:nvSpPr>
           <p:cNvPr id="37" name="Shape 35"/>
-          <p:cNvSpPr/>
-          <p:nvPr/>
-        </p:nvSpPr>
-        <p:spPr>
-          <a:xfrm>
-            <a:off x="509321" y="6894576"/>
-            <a:ext cx="384048" cy="256032"/>
-          </a:xfrm>
-          <a:prstGeom prst="roundRect">
-            <a:avLst>
-              <a:gd name="adj" fmla="val 17857"/>
-            </a:avLst>
-          </a:prstGeom>
-          <a:solidFill>
-            <a:srgbClr val="1E2A5C"/>
-          </a:solidFill>
-          <a:ln/>
-        </p:spPr>
-      </p:sp>
-      <p:sp>
-        <p:nvSpPr>
-          <p:cNvPr id="38" name="Text 36"/>
-          <p:cNvSpPr txBox="1"/>
-          <p:nvPr/>
-        </p:nvSpPr>
-        <p:spPr>
-          <a:xfrm>
-            <a:off x="984809" y="6858000"/>
-            <a:ext cx="1783080" cy="329184"/>
-          </a:xfrm>
-          <a:prstGeom prst="rect">
-            <a:avLst/>
-          </a:prstGeom>
-          <a:noFill/>
-          <a:ln/>
-        </p:spPr>
-        <p:txBody>
-          <a:bodyPr wrap="square" lIns="0" tIns="0" rIns="0" bIns="0" rtlCol="0" anchor="ctr"/>
-          <a:lstStyle/>
-          <a:p>
-            <a:pPr indent="0" marL="0">
-              <a:buNone/>
-            </a:pPr>
-            <a:r>
-              <a:rPr lang="en-US" sz="1400" dirty="0">
-                <a:solidFill>
-                  <a:srgbClr val="4A5364"/>
-                </a:solidFill>
-                <a:latin typeface="Pretendard" pitchFamily="34" charset="0"/>
-                <a:ea typeface="Pretendard" pitchFamily="34" charset="-122"/>
-                <a:cs typeface="Pretendard" pitchFamily="34" charset="-120"/>
-              </a:rPr>
-              <a:t>v0 구현됨</a:t>
-            </a:r>
-            <a:endParaRPr lang="en-US" sz="1400" dirty="0"/>
-          </a:p>
-        </p:txBody>
-      </p:sp>
-      <p:sp>
-        <p:nvSpPr>
-          <p:cNvPr id="39" name="Shape 37"/>
-          <p:cNvSpPr/>
-          <p:nvPr/>
-        </p:nvSpPr>
-        <p:spPr>
-          <a:xfrm>
-            <a:off x="2841041" y="6894576"/>
-            <a:ext cx="384048" cy="256032"/>
-          </a:xfrm>
-          <a:prstGeom prst="roundRect">
-            <a:avLst>
-              <a:gd name="adj" fmla="val 17857"/>
-            </a:avLst>
-          </a:prstGeom>
-          <a:solidFill>
-            <a:srgbClr val="EEF3FA"/>
-          </a:solidFill>
-          <a:ln w="19050">
-            <a:solidFill>
-              <a:srgbClr val="1E2A5C"/>
-            </a:solidFill>
-            <a:prstDash val="solid"/>
-          </a:ln>
-        </p:spPr>
-      </p:sp>
-      <p:sp>
-        <p:nvSpPr>
-          <p:cNvPr id="40" name="Text 38"/>
-          <p:cNvSpPr txBox="1"/>
-          <p:nvPr/>
-        </p:nvSpPr>
-        <p:spPr>
-          <a:xfrm>
-            <a:off x="3316529" y="6858000"/>
-            <a:ext cx="1783080" cy="329184"/>
-          </a:xfrm>
-          <a:prstGeom prst="rect">
-            <a:avLst/>
-          </a:prstGeom>
-          <a:noFill/>
-          <a:ln/>
-        </p:spPr>
-        <p:txBody>
-          <a:bodyPr wrap="square" lIns="0" tIns="0" rIns="0" bIns="0" rtlCol="0" anchor="ctr"/>
-          <a:lstStyle/>
-          <a:p>
-            <a:pPr indent="0" marL="0">
-              <a:buNone/>
-            </a:pPr>
-            <a:r>
-              <a:rPr lang="en-US" sz="1400" dirty="0">
-                <a:solidFill>
-                  <a:srgbClr val="4A5364"/>
-                </a:solidFill>
-                <a:latin typeface="Pretendard" pitchFamily="34" charset="0"/>
-                <a:ea typeface="Pretendard" pitchFamily="34" charset="-122"/>
-                <a:cs typeface="Pretendard" pitchFamily="34" charset="-120"/>
-              </a:rPr>
-              <a:t>일부 구현</a:t>
-            </a:r>
-            <a:endParaRPr lang="en-US" sz="1400" dirty="0"/>
-          </a:p>
-        </p:txBody>
-      </p:sp>
-      <p:sp>
-        <p:nvSpPr>
-          <p:cNvPr id="41" name="Shape 39"/>
-          <p:cNvSpPr/>
-          <p:nvPr/>
-        </p:nvSpPr>
-        <p:spPr>
-          <a:xfrm>
-            <a:off x="5172761" y="6894576"/>
-            <a:ext cx="384048" cy="256032"/>
-          </a:xfrm>
-          <a:prstGeom prst="roundRect">
-            <a:avLst>
-              <a:gd name="adj" fmla="val 17857"/>
-            </a:avLst>
-          </a:prstGeom>
-          <a:solidFill>
-            <a:srgbClr val="FFFFFF"/>
-          </a:solidFill>
-          <a:ln w="19050">
-            <a:solidFill>
-              <a:srgbClr val="2E74C6"/>
-            </a:solidFill>
-            <a:prstDash val="dash"/>
-          </a:ln>
-        </p:spPr>
-      </p:sp>
-      <p:sp>
-        <p:nvSpPr>
-          <p:cNvPr id="42" name="Text 40"/>
-          <p:cNvSpPr txBox="1"/>
-          <p:nvPr/>
-        </p:nvSpPr>
-        <p:spPr>
-          <a:xfrm>
-            <a:off x="5648249" y="6858000"/>
-            <a:ext cx="1783080" cy="329184"/>
-          </a:xfrm>
-          <a:prstGeom prst="rect">
-            <a:avLst/>
-          </a:prstGeom>
-          <a:noFill/>
-          <a:ln/>
-        </p:spPr>
-        <p:txBody>
-          <a:bodyPr wrap="square" lIns="0" tIns="0" rIns="0" bIns="0" rtlCol="0" anchor="ctr"/>
-          <a:lstStyle/>
-          <a:p>
-            <a:pPr indent="0" marL="0">
-              <a:buNone/>
-            </a:pPr>
-            <a:r>
-              <a:rPr lang="en-US" sz="1400" dirty="0">
-                <a:solidFill>
-                  <a:srgbClr val="4A5364"/>
-                </a:solidFill>
-                <a:latin typeface="Pretendard" pitchFamily="34" charset="0"/>
-                <a:ea typeface="Pretendard" pitchFamily="34" charset="-122"/>
-                <a:cs typeface="Pretendard" pitchFamily="34" charset="-120"/>
-              </a:rPr>
-              <a:t>확장(최종안)</a:t>
-            </a:r>
-            <a:endParaRPr lang="en-US" sz="1400" dirty="0"/>
-          </a:p>
-        </p:txBody>
-      </p:sp>
-      <p:sp>
-        <p:nvSpPr>
-          <p:cNvPr id="43" name="Shape 41"/>
           <p:cNvSpPr/>
           <p:nvPr/>
         </p:nvSpPr>
@@ -14946,7 +14106,7 @@
       </p:sp>
       <p:sp>
         <p:nvSpPr>
-          <p:cNvPr id="44" name="Text 42">
+          <p:cNvPr id="38" name="Text 36">
             <a:hlinkClick r:id="rId1" tooltip=""/>
           </p:cNvPr>
           <p:cNvSpPr/>
@@ -14994,7 +14154,7 @@
       </p:sp>
       <p:sp>
         <p:nvSpPr>
-          <p:cNvPr id="45" name="Shape 43"/>
+          <p:cNvPr id="39" name="Shape 37"/>
           <p:cNvSpPr/>
           <p:nvPr/>
         </p:nvSpPr>
@@ -15017,7 +14177,7 @@
       </p:sp>
       <p:sp>
         <p:nvSpPr>
-          <p:cNvPr id="46" name="Text 44"/>
+          <p:cNvPr id="40" name="Text 38"/>
           <p:cNvSpPr txBox="1"/>
           <p:nvPr/>
         </p:nvSpPr>
@@ -15048,7 +14208,7 @@
                 <a:ea typeface="Pretendard" pitchFamily="34" charset="-122"/>
                 <a:cs typeface="Pretendard" pitchFamily="34" charset="-120"/>
               </a:rPr>
-              <a:t>출처: teacher/graphrag/v0/graph_search.py, Microsoft GraphRAG local_search.md, Neo4j 블로그(키워드 병행)</a:t>
+              <a:t>출처: teacher/plan/graphrag-search-flow.md 4절, Microsoft GraphRAG local_search.md, Neo4j 블로그(키워드 병행)</a:t>
             </a:r>
             <a:endParaRPr lang="en-US" sz="1400" dirty="0"/>
           </a:p>
@@ -15216,11 +14376,11 @@
         <p:spPr>
           <a:xfrm>
             <a:off x="509321" y="1737360"/>
-            <a:ext cx="13624560" cy="2788920"/>
+            <a:ext cx="13624560" cy="2560320"/>
           </a:xfrm>
           <a:prstGeom prst="roundRect">
             <a:avLst>
-              <a:gd name="adj" fmla="val 2623"/>
+              <a:gd name="adj" fmla="val 2857"/>
             </a:avLst>
           </a:prstGeom>
           <a:solidFill>
@@ -15243,7 +14403,7 @@
         <p:spPr>
           <a:xfrm>
             <a:off x="646481" y="1810512"/>
-            <a:ext cx="13350240" cy="2642616"/>
+            <a:ext cx="13350240" cy="2414016"/>
           </a:xfrm>
           <a:prstGeom prst="rect">
             <a:avLst/>
@@ -15270,7 +14430,7 @@
                 <a:ea typeface="Pretendard" pitchFamily="34" charset="-122"/>
                 <a:cs typeface="Pretendard" pitchFamily="34" charset="-120"/>
               </a:rPr>
-              <a:t>엔티티 갈래 Cypher(graph_search.py HYBRID_QUERY 발췌)</a:t>
+              <a:t>엔티티 갈래 Cypher 예시</a:t>
             </a:r>
             <a:endParaRPr lang="en-US" sz="1600" dirty="0"/>
           </a:p>
@@ -15451,12 +14611,12 @@
         </p:nvSpPr>
         <p:spPr>
           <a:xfrm>
-            <a:off x="509321" y="4709160"/>
-            <a:ext cx="4419600" cy="2011680"/>
+            <a:off x="509321" y="4480560"/>
+            <a:ext cx="4419600" cy="2240280"/>
           </a:xfrm>
           <a:prstGeom prst="roundRect">
             <a:avLst>
-              <a:gd name="adj" fmla="val 4545"/>
+              <a:gd name="adj" fmla="val 4082"/>
             </a:avLst>
           </a:prstGeom>
           <a:solidFill>
@@ -15474,7 +14634,7 @@
           <a:p>
             <a:pPr algn="l" indent="0" marL="0">
               <a:spcAft>
-                <a:spcPts val="1200"/>
+                <a:spcPts val="1800"/>
               </a:spcAft>
               <a:buNone/>
             </a:pPr>
@@ -15494,7 +14654,7 @@
           <a:p>
             <a:pPr algn="l" indent="0" marL="0">
               <a:spcAft>
-                <a:spcPts val="1200"/>
+                <a:spcPts val="1800"/>
               </a:spcAft>
               <a:buNone/>
             </a:pPr>
@@ -15514,7 +14674,7 @@
           <a:p>
             <a:pPr algn="l" indent="0" marL="0">
               <a:spcAft>
-                <a:spcPts val="1200"/>
+                <a:spcPts val="1800"/>
               </a:spcAft>
               <a:buNone/>
             </a:pPr>
@@ -15541,12 +14701,12 @@
         </p:nvSpPr>
         <p:spPr>
           <a:xfrm>
-            <a:off x="5111801" y="4709160"/>
-            <a:ext cx="4419600" cy="2011680"/>
+            <a:off x="5111801" y="4480560"/>
+            <a:ext cx="4419600" cy="2240280"/>
           </a:xfrm>
           <a:prstGeom prst="roundRect">
             <a:avLst>
-              <a:gd name="adj" fmla="val 4545"/>
+              <a:gd name="adj" fmla="val 4082"/>
             </a:avLst>
           </a:prstGeom>
           <a:solidFill>
@@ -15568,7 +14728,7 @@
         </p:nvSpPr>
         <p:spPr>
           <a:xfrm>
-            <a:off x="5294681" y="4818888"/>
+            <a:off x="5294681" y="4590288"/>
             <a:ext cx="4053840" cy="365760"/>
           </a:xfrm>
           <a:prstGeom prst="rect">
@@ -15607,8 +14767,8 @@
         </p:nvSpPr>
         <p:spPr>
           <a:xfrm>
-            <a:off x="5294681" y="5349240"/>
-            <a:ext cx="2026920" cy="566928"/>
+            <a:off x="5294681" y="5074920"/>
+            <a:ext cx="2026920" cy="502920"/>
           </a:xfrm>
           <a:prstGeom prst="rect">
             <a:avLst/>
@@ -15652,7 +14812,7 @@
         </p:nvSpPr>
         <p:spPr>
           <a:xfrm>
-            <a:off x="5294681" y="6025896"/>
+            <a:off x="5294681" y="5715000"/>
             <a:ext cx="4053840" cy="310896"/>
           </a:xfrm>
           <a:prstGeom prst="rect">
@@ -15705,8 +14865,8 @@
         </p:nvSpPr>
         <p:spPr>
           <a:xfrm>
-            <a:off x="7321601" y="5349240"/>
-            <a:ext cx="1418844" cy="566928"/>
+            <a:off x="7321601" y="5074920"/>
+            <a:ext cx="1418844" cy="502920"/>
           </a:xfrm>
           <a:prstGeom prst="rect">
             <a:avLst/>
@@ -15750,7 +14910,7 @@
         </p:nvSpPr>
         <p:spPr>
           <a:xfrm>
-            <a:off x="5294681" y="6355080"/>
+            <a:off x="5294681" y="6062472"/>
             <a:ext cx="4053840" cy="310896"/>
           </a:xfrm>
           <a:prstGeom prst="rect">
@@ -15803,8 +14963,8 @@
         </p:nvSpPr>
         <p:spPr>
           <a:xfrm>
-            <a:off x="8740445" y="5349240"/>
-            <a:ext cx="608076" cy="566928"/>
+            <a:off x="8740445" y="5074920"/>
+            <a:ext cx="608076" cy="502920"/>
           </a:xfrm>
           <a:prstGeom prst="rect">
             <a:avLst/>
@@ -15848,7 +15008,7 @@
         </p:nvSpPr>
         <p:spPr>
           <a:xfrm>
-            <a:off x="5294681" y="6684264"/>
+            <a:off x="5294681" y="6409944"/>
             <a:ext cx="4053840" cy="310896"/>
           </a:xfrm>
           <a:prstGeom prst="rect">
@@ -15901,12 +15061,12 @@
         </p:nvSpPr>
         <p:spPr>
           <a:xfrm>
-            <a:off x="9714281" y="4709160"/>
-            <a:ext cx="4419600" cy="2011680"/>
+            <a:off x="9714281" y="4480560"/>
+            <a:ext cx="4419600" cy="2240280"/>
           </a:xfrm>
           <a:prstGeom prst="roundRect">
             <a:avLst>
-              <a:gd name="adj" fmla="val 4545"/>
+              <a:gd name="adj" fmla="val 4082"/>
             </a:avLst>
           </a:prstGeom>
           <a:solidFill>
@@ -15929,7 +15089,7 @@
               <a:buNone/>
             </a:pPr>
             <a:r>
-              <a:rPr lang="en-US" sz="1700" b="1" dirty="0">
+              <a:rPr lang="en-US" sz="1800" b="1" dirty="0">
                 <a:solidFill>
                   <a:srgbClr val="1E2A5C"/>
                 </a:solidFill>
@@ -15937,20 +15097,20 @@
                 <a:ea typeface="Pretendard" pitchFamily="34" charset="-122"/>
                 <a:cs typeface="Pretendard" pitchFamily="34" charset="-120"/>
               </a:rPr>
-              <a:t>최종안에서 바꾸는 점</a:t>
-            </a:r>
-            <a:endParaRPr lang="en-US" sz="1700" dirty="0"/>
+              <a:t>설계 기준</a:t>
+            </a:r>
+            <a:endParaRPr lang="en-US" sz="1800" dirty="0"/>
           </a:p>
           <a:p>
             <a:pPr algn="l" marL="228600" indent="-228600">
               <a:spcAft>
-                <a:spcPts val="700"/>
+                <a:spcPts val="1000"/>
               </a:spcAft>
               <a:buSzPct val="100000"/>
               <a:buChar char="•"/>
             </a:pPr>
             <a:r>
-              <a:rPr lang="en-US" sz="1400" dirty="0">
+              <a:rPr lang="en-US" sz="1500" dirty="0">
                 <a:solidFill>
                   <a:srgbClr val="2B3242"/>
                 </a:solidFill>
@@ -15958,20 +15118,20 @@
                 <a:ea typeface="Pretendard" pitchFamily="34" charset="-122"/>
                 <a:cs typeface="Pretendard" pitchFamily="34" charset="-120"/>
               </a:rPr>
-              <a:t>원문 상한 700자 → 1600자(청크 260개 중 131개가 700자를 넘음)</a:t>
-            </a:r>
-            <a:endParaRPr lang="en-US" sz="1700" dirty="0"/>
+              <a:t>원문 상한 1600자(청크 260개 중 131개가 700자를 넘음)</a:t>
+            </a:r>
+            <a:endParaRPr lang="en-US" sz="1800" dirty="0"/>
           </a:p>
           <a:p>
             <a:pPr algn="l" marL="228600" indent="-228600">
               <a:spcAft>
-                <a:spcPts val="700"/>
+                <a:spcPts val="1000"/>
               </a:spcAft>
               <a:buSzPct val="100000"/>
               <a:buChar char="•"/>
             </a:pPr>
             <a:r>
-              <a:rPr lang="en-US" sz="1400" dirty="0">
+              <a:rPr lang="en-US" sz="1500" dirty="0">
                 <a:solidFill>
                   <a:srgbClr val="2B3242"/>
                 </a:solidFill>
@@ -15981,18 +15141,18 @@
               </a:rPr>
               <a:t>원문 칸 쿼터: 청크 갈래 3, 엔티티 갈래 2 이상</a:t>
             </a:r>
-            <a:endParaRPr lang="en-US" sz="1700" dirty="0"/>
+            <a:endParaRPr lang="en-US" sz="1800" dirty="0"/>
           </a:p>
           <a:p>
             <a:pPr algn="l" marL="228600" indent="-228600">
               <a:spcAft>
-                <a:spcPts val="700"/>
+                <a:spcPts val="1000"/>
               </a:spcAft>
               <a:buSzPct val="100000"/>
               <a:buChar char="•"/>
             </a:pPr>
             <a:r>
-              <a:rPr lang="en-US" sz="1400" dirty="0">
+              <a:rPr lang="en-US" sz="1500" dirty="0">
                 <a:solidFill>
                   <a:srgbClr val="2B3242"/>
                 </a:solidFill>
@@ -16002,7 +15162,7 @@
               </a:rPr>
               <a:t>상담 질문은 첫 상담과 가장 최근 상담을 먼저 고정 칸에 넣음</a:t>
             </a:r>
-            <a:endParaRPr lang="en-US" sz="1700" dirty="0"/>
+            <a:endParaRPr lang="en-US" sz="1800" dirty="0"/>
           </a:p>
         </p:txBody>
       </p:sp>
@@ -16137,7 +15297,7 @@
                 <a:ea typeface="Pretendard" pitchFamily="34" charset="-122"/>
                 <a:cs typeface="Pretendard" pitchFamily="34" charset="-120"/>
               </a:rPr>
-              <a:t>출처: teacher/graphrag/v0/graph_search.py, Microsoft GraphRAG config defaults.py(text_unit_prop 0.5, community_prop 0.15)</a:t>
+              <a:t>출처: teacher/plan/graphrag-search-flow.md 4절, Microsoft GraphRAG config defaults.py(text_unit_prop 0.5, community_prop 0.15)</a:t>
             </a:r>
             <a:endParaRPr lang="en-US" sz="1400" dirty="0"/>
           </a:p>
@@ -16313,13 +15473,9 @@
             </a:avLst>
           </a:prstGeom>
           <a:solidFill>
-            <a:srgbClr val="EEF3FA"/>
+            <a:srgbClr val="1E2A5C"/>
           </a:solidFill>
-          <a:ln w="19050">
-            <a:solidFill>
-              <a:srgbClr val="1E2A5C"/>
-            </a:solidFill>
-          </a:ln>
+          <a:ln/>
         </p:spPr>
         <p:txBody>
           <a:bodyPr wrap="square" lIns="101600" tIns="63500" rIns="101600" bIns="63500" rtlCol="0" anchor="ctr"/>
@@ -16334,7 +15490,7 @@
             <a:r>
               <a:rPr lang="en-US" sz="2000" b="1" dirty="0">
                 <a:solidFill>
-                  <a:srgbClr val="1E2A5C"/>
+                  <a:srgbClr val="FFFFFF"/>
                 </a:solidFill>
                 <a:latin typeface="Pretendard" pitchFamily="34" charset="0"/>
                 <a:ea typeface="Pretendard" pitchFamily="34" charset="-122"/>
@@ -16354,13 +15510,13 @@
             <a:r>
               <a:rPr lang="en-US" sz="1700" dirty="0">
                 <a:solidFill>
-                  <a:srgbClr val="2B3242"/>
+                  <a:srgbClr val="FFFFFF"/>
                 </a:solidFill>
                 <a:latin typeface="Pretendard" pitchFamily="34" charset="0"/>
                 <a:ea typeface="Pretendard" pitchFamily="34" charset="-122"/>
                 <a:cs typeface="Pretendard" pitchFamily="34" charset="-120"/>
               </a:rPr>
-              <a:t>v0: 보고서 벡터 상위 5개</a:t>
+              <a:t>50개 이하면 전부</a:t>
             </a:r>
             <a:endParaRPr lang="en-US" sz="2000" dirty="0"/>
           </a:p>
@@ -16374,13 +15530,13 @@
             <a:r>
               <a:rPr lang="en-US" sz="1700" dirty="0">
                 <a:solidFill>
-                  <a:srgbClr val="2B3242"/>
+                  <a:srgbClr val="FFFFFF"/>
                 </a:solidFill>
                 <a:latin typeface="Pretendard" pitchFamily="34" charset="0"/>
                 <a:ea typeface="Pretendard" pitchFamily="34" charset="-122"/>
                 <a:cs typeface="Pretendard" pitchFamily="34" charset="-120"/>
               </a:rPr>
-              <a:t>확장: 50개 이하면 전부, 넘으면 벡터 후보 + 관련도 점수</a:t>
+              <a:t>넘으면 벡터 후보 + 관련도 점수</a:t>
             </a:r>
             <a:endParaRPr lang="en-US" sz="2000" dirty="0"/>
           </a:p>
@@ -16423,14 +15579,9 @@
             </a:avLst>
           </a:prstGeom>
           <a:solidFill>
-            <a:srgbClr val="FFFFFF"/>
+            <a:srgbClr val="1E2A5C"/>
           </a:solidFill>
-          <a:ln w="19050">
-            <a:solidFill>
-              <a:srgbClr val="2E74C6"/>
-            </a:solidFill>
-            <a:prstDash val="dash"/>
-          </a:ln>
+          <a:ln/>
         </p:spPr>
         <p:txBody>
           <a:bodyPr wrap="square" lIns="101600" tIns="63500" rIns="101600" bIns="63500" rtlCol="0" anchor="ctr"/>
@@ -16445,7 +15596,7 @@
             <a:r>
               <a:rPr lang="en-US" sz="2000" b="1" dirty="0">
                 <a:solidFill>
-                  <a:srgbClr val="1E2A5C"/>
+                  <a:srgbClr val="FFFFFF"/>
                 </a:solidFill>
                 <a:latin typeface="Pretendard" pitchFamily="34" charset="0"/>
                 <a:ea typeface="Pretendard" pitchFamily="34" charset="-122"/>
@@ -16465,13 +15616,13 @@
             <a:r>
               <a:rPr lang="en-US" sz="1700" dirty="0">
                 <a:solidFill>
-                  <a:srgbClr val="2B3242"/>
+                  <a:srgbClr val="FFFFFF"/>
                 </a:solidFill>
                 <a:latin typeface="Pretendard" pitchFamily="34" charset="0"/>
                 <a:ea typeface="Pretendard" pitchFamily="34" charset="-122"/>
                 <a:cs typeface="Pretendard" pitchFamily="34" charset="-120"/>
               </a:rPr>
-              <a:t>보고서 묶음마다 중간 답과 중요도 점수(0 ~ 100)</a:t>
+              <a:t>보고서 묶음마다 중간 답 + 점수(0 ~ 100)</a:t>
             </a:r>
             <a:endParaRPr lang="en-US" sz="2000" dirty="0"/>
           </a:p>
@@ -16485,7 +15636,7 @@
             <a:r>
               <a:rPr lang="en-US" sz="1700" dirty="0">
                 <a:solidFill>
-                  <a:srgbClr val="2B3242"/>
+                  <a:srgbClr val="FFFFFF"/>
                 </a:solidFill>
                 <a:latin typeface="Pretendard" pitchFamily="34" charset="0"/>
                 <a:ea typeface="Pretendard" pitchFamily="34" charset="-122"/>
@@ -16534,14 +15685,9 @@
             </a:avLst>
           </a:prstGeom>
           <a:solidFill>
-            <a:srgbClr val="FFFFFF"/>
+            <a:srgbClr val="1E2A5C"/>
           </a:solidFill>
-          <a:ln w="19050">
-            <a:solidFill>
-              <a:srgbClr val="2E74C6"/>
-            </a:solidFill>
-            <a:prstDash val="dash"/>
-          </a:ln>
+          <a:ln/>
         </p:spPr>
         <p:txBody>
           <a:bodyPr wrap="square" lIns="101600" tIns="63500" rIns="101600" bIns="63500" rtlCol="0" anchor="ctr"/>
@@ -16556,7 +15702,7 @@
             <a:r>
               <a:rPr lang="en-US" sz="2000" b="1" dirty="0">
                 <a:solidFill>
-                  <a:srgbClr val="1E2A5C"/>
+                  <a:srgbClr val="FFFFFF"/>
                 </a:solidFill>
                 <a:latin typeface="Pretendard" pitchFamily="34" charset="0"/>
                 <a:ea typeface="Pretendard" pitchFamily="34" charset="-122"/>
@@ -16576,7 +15722,7 @@
             <a:r>
               <a:rPr lang="en-US" sz="1700" dirty="0">
                 <a:solidFill>
-                  <a:srgbClr val="2B3242"/>
+                  <a:srgbClr val="FFFFFF"/>
                 </a:solidFill>
                 <a:latin typeface="Pretendard" pitchFamily="34" charset="0"/>
                 <a:ea typeface="Pretendard" pitchFamily="34" charset="-122"/>
@@ -16596,7 +15742,7 @@
             <a:r>
               <a:rPr lang="en-US" sz="1700" dirty="0">
                 <a:solidFill>
-                  <a:srgbClr val="2B3242"/>
+                  <a:srgbClr val="FFFFFF"/>
                 </a:solidFill>
                 <a:latin typeface="Pretendard" pitchFamily="34" charset="0"/>
                 <a:ea typeface="Pretendard" pitchFamily="34" charset="-122"/>
@@ -16837,199 +15983,6 @@
       <p:sp>
         <p:nvSpPr>
           <p:cNvPr id="11" name="Shape 9"/>
-          <p:cNvSpPr/>
-          <p:nvPr/>
-        </p:nvSpPr>
-        <p:spPr>
-          <a:xfrm>
-            <a:off x="509321" y="6894576"/>
-            <a:ext cx="384048" cy="256032"/>
-          </a:xfrm>
-          <a:prstGeom prst="roundRect">
-            <a:avLst>
-              <a:gd name="adj" fmla="val 17857"/>
-            </a:avLst>
-          </a:prstGeom>
-          <a:solidFill>
-            <a:srgbClr val="1E2A5C"/>
-          </a:solidFill>
-          <a:ln/>
-        </p:spPr>
-      </p:sp>
-      <p:sp>
-        <p:nvSpPr>
-          <p:cNvPr id="12" name="Text 10"/>
-          <p:cNvSpPr txBox="1"/>
-          <p:nvPr/>
-        </p:nvSpPr>
-        <p:spPr>
-          <a:xfrm>
-            <a:off x="984809" y="6858000"/>
-            <a:ext cx="1783080" cy="329184"/>
-          </a:xfrm>
-          <a:prstGeom prst="rect">
-            <a:avLst/>
-          </a:prstGeom>
-          <a:noFill/>
-          <a:ln/>
-        </p:spPr>
-        <p:txBody>
-          <a:bodyPr wrap="square" lIns="0" tIns="0" rIns="0" bIns="0" rtlCol="0" anchor="ctr"/>
-          <a:lstStyle/>
-          <a:p>
-            <a:pPr indent="0" marL="0">
-              <a:buNone/>
-            </a:pPr>
-            <a:r>
-              <a:rPr lang="en-US" sz="1400" dirty="0">
-                <a:solidFill>
-                  <a:srgbClr val="4A5364"/>
-                </a:solidFill>
-                <a:latin typeface="Pretendard" pitchFamily="34" charset="0"/>
-                <a:ea typeface="Pretendard" pitchFamily="34" charset="-122"/>
-                <a:cs typeface="Pretendard" pitchFamily="34" charset="-120"/>
-              </a:rPr>
-              <a:t>v0 구현됨</a:t>
-            </a:r>
-            <a:endParaRPr lang="en-US" sz="1400" dirty="0"/>
-          </a:p>
-        </p:txBody>
-      </p:sp>
-      <p:sp>
-        <p:nvSpPr>
-          <p:cNvPr id="13" name="Shape 11"/>
-          <p:cNvSpPr/>
-          <p:nvPr/>
-        </p:nvSpPr>
-        <p:spPr>
-          <a:xfrm>
-            <a:off x="2841041" y="6894576"/>
-            <a:ext cx="384048" cy="256032"/>
-          </a:xfrm>
-          <a:prstGeom prst="roundRect">
-            <a:avLst>
-              <a:gd name="adj" fmla="val 17857"/>
-            </a:avLst>
-          </a:prstGeom>
-          <a:solidFill>
-            <a:srgbClr val="EEF3FA"/>
-          </a:solidFill>
-          <a:ln w="19050">
-            <a:solidFill>
-              <a:srgbClr val="1E2A5C"/>
-            </a:solidFill>
-            <a:prstDash val="solid"/>
-          </a:ln>
-        </p:spPr>
-      </p:sp>
-      <p:sp>
-        <p:nvSpPr>
-          <p:cNvPr id="14" name="Text 12"/>
-          <p:cNvSpPr txBox="1"/>
-          <p:nvPr/>
-        </p:nvSpPr>
-        <p:spPr>
-          <a:xfrm>
-            <a:off x="3316529" y="6858000"/>
-            <a:ext cx="1783080" cy="329184"/>
-          </a:xfrm>
-          <a:prstGeom prst="rect">
-            <a:avLst/>
-          </a:prstGeom>
-          <a:noFill/>
-          <a:ln/>
-        </p:spPr>
-        <p:txBody>
-          <a:bodyPr wrap="square" lIns="0" tIns="0" rIns="0" bIns="0" rtlCol="0" anchor="ctr"/>
-          <a:lstStyle/>
-          <a:p>
-            <a:pPr indent="0" marL="0">
-              <a:buNone/>
-            </a:pPr>
-            <a:r>
-              <a:rPr lang="en-US" sz="1400" dirty="0">
-                <a:solidFill>
-                  <a:srgbClr val="4A5364"/>
-                </a:solidFill>
-                <a:latin typeface="Pretendard" pitchFamily="34" charset="0"/>
-                <a:ea typeface="Pretendard" pitchFamily="34" charset="-122"/>
-                <a:cs typeface="Pretendard" pitchFamily="34" charset="-120"/>
-              </a:rPr>
-              <a:t>일부 구현</a:t>
-            </a:r>
-            <a:endParaRPr lang="en-US" sz="1400" dirty="0"/>
-          </a:p>
-        </p:txBody>
-      </p:sp>
-      <p:sp>
-        <p:nvSpPr>
-          <p:cNvPr id="15" name="Shape 13"/>
-          <p:cNvSpPr/>
-          <p:nvPr/>
-        </p:nvSpPr>
-        <p:spPr>
-          <a:xfrm>
-            <a:off x="5172761" y="6894576"/>
-            <a:ext cx="384048" cy="256032"/>
-          </a:xfrm>
-          <a:prstGeom prst="roundRect">
-            <a:avLst>
-              <a:gd name="adj" fmla="val 17857"/>
-            </a:avLst>
-          </a:prstGeom>
-          <a:solidFill>
-            <a:srgbClr val="FFFFFF"/>
-          </a:solidFill>
-          <a:ln w="19050">
-            <a:solidFill>
-              <a:srgbClr val="2E74C6"/>
-            </a:solidFill>
-            <a:prstDash val="dash"/>
-          </a:ln>
-        </p:spPr>
-      </p:sp>
-      <p:sp>
-        <p:nvSpPr>
-          <p:cNvPr id="16" name="Text 14"/>
-          <p:cNvSpPr txBox="1"/>
-          <p:nvPr/>
-        </p:nvSpPr>
-        <p:spPr>
-          <a:xfrm>
-            <a:off x="5648249" y="6858000"/>
-            <a:ext cx="1783080" cy="329184"/>
-          </a:xfrm>
-          <a:prstGeom prst="rect">
-            <a:avLst/>
-          </a:prstGeom>
-          <a:noFill/>
-          <a:ln/>
-        </p:spPr>
-        <p:txBody>
-          <a:bodyPr wrap="square" lIns="0" tIns="0" rIns="0" bIns="0" rtlCol="0" anchor="ctr"/>
-          <a:lstStyle/>
-          <a:p>
-            <a:pPr indent="0" marL="0">
-              <a:buNone/>
-            </a:pPr>
-            <a:r>
-              <a:rPr lang="en-US" sz="1400" dirty="0">
-                <a:solidFill>
-                  <a:srgbClr val="4A5364"/>
-                </a:solidFill>
-                <a:latin typeface="Pretendard" pitchFamily="34" charset="0"/>
-                <a:ea typeface="Pretendard" pitchFamily="34" charset="-122"/>
-                <a:cs typeface="Pretendard" pitchFamily="34" charset="-120"/>
-              </a:rPr>
-              <a:t>확장(최종안)</a:t>
-            </a:r>
-            <a:endParaRPr lang="en-US" sz="1400" dirty="0"/>
-          </a:p>
-        </p:txBody>
-      </p:sp>
-      <p:sp>
-        <p:nvSpPr>
-          <p:cNvPr id="17" name="Shape 15"/>
           <p:cNvSpPr/>
           <p:nvPr/>
         </p:nvSpPr>
@@ -17056,7 +16009,7 @@
       </p:sp>
       <p:sp>
         <p:nvSpPr>
-          <p:cNvPr id="18" name="Text 16">
+          <p:cNvPr id="12" name="Text 10">
             <a:hlinkClick r:id="rId1" tooltip=""/>
           </p:cNvPr>
           <p:cNvSpPr/>
@@ -17104,7 +16057,7 @@
       </p:sp>
       <p:sp>
         <p:nvSpPr>
-          <p:cNvPr id="19" name="Shape 17"/>
+          <p:cNvPr id="13" name="Shape 11"/>
           <p:cNvSpPr/>
           <p:nvPr/>
         </p:nvSpPr>
@@ -17127,7 +16080,7 @@
       </p:sp>
       <p:sp>
         <p:nvSpPr>
-          <p:cNvPr id="20" name="Text 18"/>
+          <p:cNvPr id="14" name="Text 12"/>
           <p:cNvSpPr txBox="1"/>
           <p:nvPr/>
         </p:nvSpPr>
@@ -17334,14 +16287,9 @@
             </a:avLst>
           </a:prstGeom>
           <a:solidFill>
-            <a:srgbClr val="FFFFFF"/>
+            <a:srgbClr val="1E2A5C"/>
           </a:solidFill>
-          <a:ln w="19050">
-            <a:solidFill>
-              <a:srgbClr val="2E74C6"/>
-            </a:solidFill>
-            <a:prstDash val="dash"/>
-          </a:ln>
+          <a:ln/>
         </p:spPr>
         <p:txBody>
           <a:bodyPr wrap="square" lIns="101600" tIns="63500" rIns="101600" bIns="63500" rtlCol="0" anchor="ctr"/>
@@ -17356,7 +16304,7 @@
             <a:r>
               <a:rPr lang="en-US" sz="2000" b="1" dirty="0">
                 <a:solidFill>
-                  <a:srgbClr val="1E2A5C"/>
+                  <a:srgbClr val="FFFFFF"/>
                 </a:solidFill>
                 <a:latin typeface="Pretendard" pitchFamily="34" charset="0"/>
                 <a:ea typeface="Pretendard" pitchFamily="34" charset="-122"/>
@@ -17376,7 +16324,7 @@
             <a:r>
               <a:rPr lang="en-US" sz="1700" dirty="0">
                 <a:solidFill>
-                  <a:srgbClr val="2B3242"/>
+                  <a:srgbClr val="FFFFFF"/>
                 </a:solidFill>
                 <a:latin typeface="Pretendard" pitchFamily="34" charset="0"/>
                 <a:ea typeface="Pretendard" pitchFamily="34" charset="-122"/>
@@ -17396,7 +16344,7 @@
             <a:r>
               <a:rPr lang="en-US" sz="1700" dirty="0">
                 <a:solidFill>
-                  <a:srgbClr val="2B3242"/>
+                  <a:srgbClr val="FFFFFF"/>
                 </a:solidFill>
                 <a:latin typeface="Pretendard" pitchFamily="34" charset="0"/>
                 <a:ea typeface="Pretendard" pitchFamily="34" charset="-122"/>
@@ -17445,14 +16393,9 @@
             </a:avLst>
           </a:prstGeom>
           <a:solidFill>
-            <a:srgbClr val="FFFFFF"/>
+            <a:srgbClr val="1E2A5C"/>
           </a:solidFill>
-          <a:ln w="19050">
-            <a:solidFill>
-              <a:srgbClr val="2E74C6"/>
-            </a:solidFill>
-            <a:prstDash val="dash"/>
-          </a:ln>
+          <a:ln/>
         </p:spPr>
         <p:txBody>
           <a:bodyPr wrap="square" lIns="101600" tIns="63500" rIns="101600" bIns="63500" rtlCol="0" anchor="ctr"/>
@@ -17467,7 +16410,7 @@
             <a:r>
               <a:rPr lang="en-US" sz="2000" b="1" dirty="0">
                 <a:solidFill>
-                  <a:srgbClr val="1E2A5C"/>
+                  <a:srgbClr val="FFFFFF"/>
                 </a:solidFill>
                 <a:latin typeface="Pretendard" pitchFamily="34" charset="0"/>
                 <a:ea typeface="Pretendard" pitchFamily="34" charset="-122"/>
@@ -17487,7 +16430,7 @@
             <a:r>
               <a:rPr lang="en-US" sz="1700" dirty="0">
                 <a:solidFill>
-                  <a:srgbClr val="2B3242"/>
+                  <a:srgbClr val="FFFFFF"/>
                 </a:solidFill>
                 <a:latin typeface="Pretendard" pitchFamily="34" charset="0"/>
                 <a:ea typeface="Pretendard" pitchFamily="34" charset="-122"/>
@@ -17507,7 +16450,7 @@
             <a:r>
               <a:rPr lang="en-US" sz="1700" dirty="0">
                 <a:solidFill>
-                  <a:srgbClr val="2B3242"/>
+                  <a:srgbClr val="FFFFFF"/>
                 </a:solidFill>
                 <a:latin typeface="Pretendard" pitchFamily="34" charset="0"/>
                 <a:ea typeface="Pretendard" pitchFamily="34" charset="-122"/>
@@ -17556,14 +16499,9 @@
             </a:avLst>
           </a:prstGeom>
           <a:solidFill>
-            <a:srgbClr val="FFFFFF"/>
+            <a:srgbClr val="1E2A5C"/>
           </a:solidFill>
-          <a:ln w="19050">
-            <a:solidFill>
-              <a:srgbClr val="2E74C6"/>
-            </a:solidFill>
-            <a:prstDash val="dash"/>
-          </a:ln>
+          <a:ln/>
         </p:spPr>
         <p:txBody>
           <a:bodyPr wrap="square" lIns="101600" tIns="63500" rIns="101600" bIns="63500" rtlCol="0" anchor="ctr"/>
@@ -17578,7 +16516,7 @@
             <a:r>
               <a:rPr lang="en-US" sz="2000" b="1" dirty="0">
                 <a:solidFill>
-                  <a:srgbClr val="1E2A5C"/>
+                  <a:srgbClr val="FFFFFF"/>
                 </a:solidFill>
                 <a:latin typeface="Pretendard" pitchFamily="34" charset="0"/>
                 <a:ea typeface="Pretendard" pitchFamily="34" charset="-122"/>
@@ -17598,7 +16536,7 @@
             <a:r>
               <a:rPr lang="en-US" sz="1700" dirty="0">
                 <a:solidFill>
-                  <a:srgbClr val="2B3242"/>
+                  <a:srgbClr val="FFFFFF"/>
                 </a:solidFill>
                 <a:latin typeface="Pretendard" pitchFamily="34" charset="0"/>
                 <a:ea typeface="Pretendard" pitchFamily="34" charset="-122"/>
@@ -17618,7 +16556,7 @@
             <a:r>
               <a:rPr lang="en-US" sz="1700" dirty="0">
                 <a:solidFill>
-                  <a:srgbClr val="2B3242"/>
+                  <a:srgbClr val="FFFFFF"/>
                 </a:solidFill>
                 <a:latin typeface="Pretendard" pitchFamily="34" charset="0"/>
                 <a:ea typeface="Pretendard" pitchFamily="34" charset="-122"/>
@@ -17880,199 +16818,6 @@
       <p:sp>
         <p:nvSpPr>
           <p:cNvPr id="11" name="Shape 9"/>
-          <p:cNvSpPr/>
-          <p:nvPr/>
-        </p:nvSpPr>
-        <p:spPr>
-          <a:xfrm>
-            <a:off x="509321" y="6894576"/>
-            <a:ext cx="384048" cy="256032"/>
-          </a:xfrm>
-          <a:prstGeom prst="roundRect">
-            <a:avLst>
-              <a:gd name="adj" fmla="val 17857"/>
-            </a:avLst>
-          </a:prstGeom>
-          <a:solidFill>
-            <a:srgbClr val="1E2A5C"/>
-          </a:solidFill>
-          <a:ln/>
-        </p:spPr>
-      </p:sp>
-      <p:sp>
-        <p:nvSpPr>
-          <p:cNvPr id="12" name="Text 10"/>
-          <p:cNvSpPr txBox="1"/>
-          <p:nvPr/>
-        </p:nvSpPr>
-        <p:spPr>
-          <a:xfrm>
-            <a:off x="984809" y="6858000"/>
-            <a:ext cx="1783080" cy="329184"/>
-          </a:xfrm>
-          <a:prstGeom prst="rect">
-            <a:avLst/>
-          </a:prstGeom>
-          <a:noFill/>
-          <a:ln/>
-        </p:spPr>
-        <p:txBody>
-          <a:bodyPr wrap="square" lIns="0" tIns="0" rIns="0" bIns="0" rtlCol="0" anchor="ctr"/>
-          <a:lstStyle/>
-          <a:p>
-            <a:pPr indent="0" marL="0">
-              <a:buNone/>
-            </a:pPr>
-            <a:r>
-              <a:rPr lang="en-US" sz="1400" dirty="0">
-                <a:solidFill>
-                  <a:srgbClr val="4A5364"/>
-                </a:solidFill>
-                <a:latin typeface="Pretendard" pitchFamily="34" charset="0"/>
-                <a:ea typeface="Pretendard" pitchFamily="34" charset="-122"/>
-                <a:cs typeface="Pretendard" pitchFamily="34" charset="-120"/>
-              </a:rPr>
-              <a:t>v0 구현됨</a:t>
-            </a:r>
-            <a:endParaRPr lang="en-US" sz="1400" dirty="0"/>
-          </a:p>
-        </p:txBody>
-      </p:sp>
-      <p:sp>
-        <p:nvSpPr>
-          <p:cNvPr id="13" name="Shape 11"/>
-          <p:cNvSpPr/>
-          <p:nvPr/>
-        </p:nvSpPr>
-        <p:spPr>
-          <a:xfrm>
-            <a:off x="2841041" y="6894576"/>
-            <a:ext cx="384048" cy="256032"/>
-          </a:xfrm>
-          <a:prstGeom prst="roundRect">
-            <a:avLst>
-              <a:gd name="adj" fmla="val 17857"/>
-            </a:avLst>
-          </a:prstGeom>
-          <a:solidFill>
-            <a:srgbClr val="EEF3FA"/>
-          </a:solidFill>
-          <a:ln w="19050">
-            <a:solidFill>
-              <a:srgbClr val="1E2A5C"/>
-            </a:solidFill>
-            <a:prstDash val="solid"/>
-          </a:ln>
-        </p:spPr>
-      </p:sp>
-      <p:sp>
-        <p:nvSpPr>
-          <p:cNvPr id="14" name="Text 12"/>
-          <p:cNvSpPr txBox="1"/>
-          <p:nvPr/>
-        </p:nvSpPr>
-        <p:spPr>
-          <a:xfrm>
-            <a:off x="3316529" y="6858000"/>
-            <a:ext cx="1783080" cy="329184"/>
-          </a:xfrm>
-          <a:prstGeom prst="rect">
-            <a:avLst/>
-          </a:prstGeom>
-          <a:noFill/>
-          <a:ln/>
-        </p:spPr>
-        <p:txBody>
-          <a:bodyPr wrap="square" lIns="0" tIns="0" rIns="0" bIns="0" rtlCol="0" anchor="ctr"/>
-          <a:lstStyle/>
-          <a:p>
-            <a:pPr indent="0" marL="0">
-              <a:buNone/>
-            </a:pPr>
-            <a:r>
-              <a:rPr lang="en-US" sz="1400" dirty="0">
-                <a:solidFill>
-                  <a:srgbClr val="4A5364"/>
-                </a:solidFill>
-                <a:latin typeface="Pretendard" pitchFamily="34" charset="0"/>
-                <a:ea typeface="Pretendard" pitchFamily="34" charset="-122"/>
-                <a:cs typeface="Pretendard" pitchFamily="34" charset="-120"/>
-              </a:rPr>
-              <a:t>일부 구현</a:t>
-            </a:r>
-            <a:endParaRPr lang="en-US" sz="1400" dirty="0"/>
-          </a:p>
-        </p:txBody>
-      </p:sp>
-      <p:sp>
-        <p:nvSpPr>
-          <p:cNvPr id="15" name="Shape 13"/>
-          <p:cNvSpPr/>
-          <p:nvPr/>
-        </p:nvSpPr>
-        <p:spPr>
-          <a:xfrm>
-            <a:off x="5172761" y="6894576"/>
-            <a:ext cx="384048" cy="256032"/>
-          </a:xfrm>
-          <a:prstGeom prst="roundRect">
-            <a:avLst>
-              <a:gd name="adj" fmla="val 17857"/>
-            </a:avLst>
-          </a:prstGeom>
-          <a:solidFill>
-            <a:srgbClr val="FFFFFF"/>
-          </a:solidFill>
-          <a:ln w="19050">
-            <a:solidFill>
-              <a:srgbClr val="2E74C6"/>
-            </a:solidFill>
-            <a:prstDash val="dash"/>
-          </a:ln>
-        </p:spPr>
-      </p:sp>
-      <p:sp>
-        <p:nvSpPr>
-          <p:cNvPr id="16" name="Text 14"/>
-          <p:cNvSpPr txBox="1"/>
-          <p:nvPr/>
-        </p:nvSpPr>
-        <p:spPr>
-          <a:xfrm>
-            <a:off x="5648249" y="6858000"/>
-            <a:ext cx="1783080" cy="329184"/>
-          </a:xfrm>
-          <a:prstGeom prst="rect">
-            <a:avLst/>
-          </a:prstGeom>
-          <a:noFill/>
-          <a:ln/>
-        </p:spPr>
-        <p:txBody>
-          <a:bodyPr wrap="square" lIns="0" tIns="0" rIns="0" bIns="0" rtlCol="0" anchor="ctr"/>
-          <a:lstStyle/>
-          <a:p>
-            <a:pPr indent="0" marL="0">
-              <a:buNone/>
-            </a:pPr>
-            <a:r>
-              <a:rPr lang="en-US" sz="1400" dirty="0">
-                <a:solidFill>
-                  <a:srgbClr val="4A5364"/>
-                </a:solidFill>
-                <a:latin typeface="Pretendard" pitchFamily="34" charset="0"/>
-                <a:ea typeface="Pretendard" pitchFamily="34" charset="-122"/>
-                <a:cs typeface="Pretendard" pitchFamily="34" charset="-120"/>
-              </a:rPr>
-              <a:t>확장(최종안)</a:t>
-            </a:r>
-            <a:endParaRPr lang="en-US" sz="1400" dirty="0"/>
-          </a:p>
-        </p:txBody>
-      </p:sp>
-      <p:sp>
-        <p:nvSpPr>
-          <p:cNvPr id="17" name="Shape 15"/>
           <p:cNvSpPr/>
           <p:nvPr/>
         </p:nvSpPr>
@@ -18099,7 +16844,7 @@
       </p:sp>
       <p:sp>
         <p:nvSpPr>
-          <p:cNvPr id="18" name="Text 16">
+          <p:cNvPr id="12" name="Text 10">
             <a:hlinkClick r:id="rId1" tooltip=""/>
           </p:cNvPr>
           <p:cNvSpPr/>
@@ -18147,7 +16892,7 @@
       </p:sp>
       <p:sp>
         <p:nvSpPr>
-          <p:cNvPr id="19" name="Shape 17"/>
+          <p:cNvPr id="13" name="Shape 11"/>
           <p:cNvSpPr/>
           <p:nvPr/>
         </p:nvSpPr>
@@ -18170,7 +16915,7 @@
       </p:sp>
       <p:sp>
         <p:nvSpPr>
-          <p:cNvPr id="20" name="Text 18"/>
+          <p:cNvPr id="14" name="Text 12"/>
           <p:cNvSpPr txBox="1"/>
           <p:nvPr/>
         </p:nvSpPr>
@@ -19638,7 +18383,7 @@
                           <a:ea typeface="Pretendard" pitchFamily="34" charset="-122"/>
                           <a:cs typeface="Pretendard" pitchFamily="34" charset="-120"/>
                         </a:rPr>
-                        <a:t>v0 2회, 확장 2 + 묶음 수</a:t>
+                        <a:t>2 + 묶음 수</a:t>
                       </a:r>
                       <a:endParaRPr lang="en-US" sz="1700" dirty="0">
                         <a:latin typeface="Pretendard" charset="0"/>
@@ -20032,280 +18777,6 @@
                   </a:tcPr>
                 </a:tc>
               </a:tr>
-              <a:tr h="658368">
-                <a:tc>
-                  <a:txBody>
-                    <a:bodyPr/>
-                    <a:lstStyle/>
-                    <a:p>
-                      <a:pPr indent="0" marL="0">
-                        <a:buNone/>
-                      </a:pPr>
-                      <a:r>
-                        <a:rPr lang="en-US" sz="1700" b="1" dirty="0">
-                          <a:solidFill>
-                            <a:srgbClr val="1E2A5C"/>
-                          </a:solidFill>
-                          <a:latin typeface="Pretendard" pitchFamily="34" charset="0"/>
-                          <a:ea typeface="Pretendard" pitchFamily="34" charset="-122"/>
-                          <a:cs typeface="Pretendard" pitchFamily="34" charset="-120"/>
-                        </a:rPr>
-                        <a:t>구현 상태</a:t>
-                      </a:r>
-                      <a:endParaRPr lang="en-US" sz="1700" dirty="0">
-                        <a:latin typeface="Pretendard" charset="0"/>
-                        <a:ea typeface="Pretendard" charset="0"/>
-                        <a:cs typeface="Pretendard" charset="0"/>
-                      </a:endParaRPr>
-                    </a:p>
-                  </a:txBody>
-                  <a:tcPr marL="91440" marR="91440" marT="36576" marB="36576" anchor="ctr">
-                    <a:lnL w="12700" cap="flat" cmpd="sng" algn="ctr">
-                      <a:solidFill>
-                        <a:srgbClr val="EDF0F6"/>
-                      </a:solidFill>
-                      <a:prstDash val="solid"/>
-                      <a:round/>
-                      <a:headEnd type="none" w="med" len="med"/>
-                      <a:tailEnd type="none" w="med" len="med"/>
-                    </a:lnL>
-                    <a:lnR w="12700" cap="flat" cmpd="sng" algn="ctr">
-                      <a:solidFill>
-                        <a:srgbClr val="EDF0F6"/>
-                      </a:solidFill>
-                      <a:prstDash val="solid"/>
-                      <a:round/>
-                      <a:headEnd type="none" w="med" len="med"/>
-                      <a:tailEnd type="none" w="med" len="med"/>
-                    </a:lnR>
-                    <a:lnT w="12700" cap="flat" cmpd="sng" algn="ctr">
-                      <a:solidFill>
-                        <a:srgbClr val="EDF0F6"/>
-                      </a:solidFill>
-                      <a:prstDash val="solid"/>
-                      <a:round/>
-                      <a:headEnd type="none" w="med" len="med"/>
-                      <a:tailEnd type="none" w="med" len="med"/>
-                    </a:lnT>
-                    <a:lnB w="12700" cap="flat" cmpd="sng" algn="ctr">
-                      <a:solidFill>
-                        <a:srgbClr val="EDF0F6"/>
-                      </a:solidFill>
-                      <a:prstDash val="solid"/>
-                      <a:round/>
-                      <a:headEnd type="none" w="med" len="med"/>
-                      <a:tailEnd type="none" w="med" len="med"/>
-                    </a:lnB>
-                    <a:solidFill>
-                      <a:srgbClr val="F5F8FC"/>
-                    </a:solidFill>
-                  </a:tcPr>
-                </a:tc>
-                <a:tc>
-                  <a:txBody>
-                    <a:bodyPr/>
-                    <a:lstStyle/>
-                    <a:p>
-                      <a:pPr indent="0" marL="0">
-                        <a:buNone/>
-                      </a:pPr>
-                      <a:r>
-                        <a:rPr lang="en-US" sz="1700" dirty="0">
-                          <a:solidFill>
-                            <a:srgbClr val="2B3242"/>
-                          </a:solidFill>
-                          <a:latin typeface="Pretendard" pitchFamily="34" charset="0"/>
-                          <a:ea typeface="Pretendard" pitchFamily="34" charset="-122"/>
-                          <a:cs typeface="Pretendard" pitchFamily="34" charset="-120"/>
-                        </a:rPr>
-                        <a:t>구현됨(v0 --mode hybrid)</a:t>
-                      </a:r>
-                      <a:endParaRPr lang="en-US" sz="1700" dirty="0">
-                        <a:latin typeface="Pretendard" charset="0"/>
-                        <a:ea typeface="Pretendard" charset="0"/>
-                        <a:cs typeface="Pretendard" charset="0"/>
-                      </a:endParaRPr>
-                    </a:p>
-                  </a:txBody>
-                  <a:tcPr marL="91440" marR="91440" marT="36576" marB="36576" anchor="ctr">
-                    <a:lnL w="12700" cap="flat" cmpd="sng" algn="ctr">
-                      <a:solidFill>
-                        <a:srgbClr val="EDF0F6"/>
-                      </a:solidFill>
-                      <a:prstDash val="solid"/>
-                      <a:round/>
-                      <a:headEnd type="none" w="med" len="med"/>
-                      <a:tailEnd type="none" w="med" len="med"/>
-                    </a:lnL>
-                    <a:lnR w="12700" cap="flat" cmpd="sng" algn="ctr">
-                      <a:solidFill>
-                        <a:srgbClr val="EDF0F6"/>
-                      </a:solidFill>
-                      <a:prstDash val="solid"/>
-                      <a:round/>
-                      <a:headEnd type="none" w="med" len="med"/>
-                      <a:tailEnd type="none" w="med" len="med"/>
-                    </a:lnR>
-                    <a:lnT w="12700" cap="flat" cmpd="sng" algn="ctr">
-                      <a:solidFill>
-                        <a:srgbClr val="EDF0F6"/>
-                      </a:solidFill>
-                      <a:prstDash val="solid"/>
-                      <a:round/>
-                      <a:headEnd type="none" w="med" len="med"/>
-                      <a:tailEnd type="none" w="med" len="med"/>
-                    </a:lnT>
-                    <a:lnB w="12700" cap="flat" cmpd="sng" algn="ctr">
-                      <a:solidFill>
-                        <a:srgbClr val="EDF0F6"/>
-                      </a:solidFill>
-                      <a:prstDash val="solid"/>
-                      <a:round/>
-                      <a:headEnd type="none" w="med" len="med"/>
-                      <a:tailEnd type="none" w="med" len="med"/>
-                    </a:lnB>
-                    <a:solidFill>
-                      <a:srgbClr val="F5F8FC"/>
-                    </a:solidFill>
-                  </a:tcPr>
-                </a:tc>
-                <a:tc>
-                  <a:txBody>
-                    <a:bodyPr/>
-                    <a:lstStyle/>
-                    <a:p>
-                      <a:pPr indent="0" marL="0">
-                        <a:buNone/>
-                      </a:pPr>
-                      <a:r>
-                        <a:rPr lang="en-US" sz="1700" dirty="0">
-                          <a:solidFill>
-                            <a:srgbClr val="2B3242"/>
-                          </a:solidFill>
-                          <a:latin typeface="Pretendard" pitchFamily="34" charset="0"/>
-                          <a:ea typeface="Pretendard" pitchFamily="34" charset="-122"/>
-                          <a:cs typeface="Pretendard" pitchFamily="34" charset="-120"/>
-                        </a:rPr>
-                        <a:t>일부(보고서 상위 5)</a:t>
-                      </a:r>
-                      <a:endParaRPr lang="en-US" sz="1700" dirty="0">
-                        <a:latin typeface="Pretendard" charset="0"/>
-                        <a:ea typeface="Pretendard" charset="0"/>
-                        <a:cs typeface="Pretendard" charset="0"/>
-                      </a:endParaRPr>
-                    </a:p>
-                  </a:txBody>
-                  <a:tcPr marL="91440" marR="91440" marT="36576" marB="36576" anchor="ctr">
-                    <a:lnL w="12700" cap="flat" cmpd="sng" algn="ctr">
-                      <a:solidFill>
-                        <a:srgbClr val="EDF0F6"/>
-                      </a:solidFill>
-                      <a:prstDash val="solid"/>
-                      <a:round/>
-                      <a:headEnd type="none" w="med" len="med"/>
-                      <a:tailEnd type="none" w="med" len="med"/>
-                    </a:lnL>
-                    <a:lnR w="12700" cap="flat" cmpd="sng" algn="ctr">
-                      <a:solidFill>
-                        <a:srgbClr val="EDF0F6"/>
-                      </a:solidFill>
-                      <a:prstDash val="solid"/>
-                      <a:round/>
-                      <a:headEnd type="none" w="med" len="med"/>
-                      <a:tailEnd type="none" w="med" len="med"/>
-                    </a:lnR>
-                    <a:lnT w="12700" cap="flat" cmpd="sng" algn="ctr">
-                      <a:solidFill>
-                        <a:srgbClr val="EDF0F6"/>
-                      </a:solidFill>
-                      <a:prstDash val="solid"/>
-                      <a:round/>
-                      <a:headEnd type="none" w="med" len="med"/>
-                      <a:tailEnd type="none" w="med" len="med"/>
-                    </a:lnT>
-                    <a:lnB w="12700" cap="flat" cmpd="sng" algn="ctr">
-                      <a:solidFill>
-                        <a:srgbClr val="EDF0F6"/>
-                      </a:solidFill>
-                      <a:prstDash val="solid"/>
-                      <a:round/>
-                      <a:headEnd type="none" w="med" len="med"/>
-                      <a:tailEnd type="none" w="med" len="med"/>
-                    </a:lnB>
-                    <a:solidFill>
-                      <a:srgbClr val="F5F8FC"/>
-                    </a:solidFill>
-                  </a:tcPr>
-                </a:tc>
-                <a:tc>
-                  <a:txBody>
-                    <a:bodyPr/>
-                    <a:lstStyle/>
-                    <a:p>
-                      <a:pPr indent="0" marL="0">
-                        <a:buNone/>
-                      </a:pPr>
-                      <a:r>
-                        <a:rPr lang="en-US" sz="1700" dirty="0">
-                          <a:solidFill>
-                            <a:srgbClr val="2B3242"/>
-                          </a:solidFill>
-                          <a:latin typeface="Pretendard" pitchFamily="34" charset="0"/>
-                          <a:ea typeface="Pretendard" pitchFamily="34" charset="-122"/>
-                          <a:cs typeface="Pretendard" pitchFamily="34" charset="-120"/>
-                        </a:rPr>
-                        <a:t>확장</a:t>
-                      </a:r>
-                      <a:endParaRPr lang="en-US" sz="1700" dirty="0">
-                        <a:latin typeface="Pretendard" charset="0"/>
-                        <a:ea typeface="Pretendard" charset="0"/>
-                        <a:cs typeface="Pretendard" charset="0"/>
-                      </a:endParaRPr>
-                    </a:p>
-                  </a:txBody>
-                  <a:tcPr marL="91440" marR="91440" marT="36576" marB="36576" anchor="ctr">
-                    <a:lnL w="12700" cap="flat" cmpd="sng" algn="ctr">
-                      <a:solidFill>
-                        <a:srgbClr val="EDF0F6"/>
-                      </a:solidFill>
-                      <a:prstDash val="solid"/>
-                      <a:round/>
-                      <a:headEnd type="none" w="med" len="med"/>
-                      <a:tailEnd type="none" w="med" len="med"/>
-                    </a:lnL>
-                    <a:lnR w="12700" cap="flat" cmpd="sng" algn="ctr">
-                      <a:solidFill>
-                        <a:srgbClr val="EDF0F6"/>
-                      </a:solidFill>
-                      <a:prstDash val="solid"/>
-                      <a:round/>
-                      <a:headEnd type="none" w="med" len="med"/>
-                      <a:tailEnd type="none" w="med" len="med"/>
-                    </a:lnR>
-                    <a:lnT w="12700" cap="flat" cmpd="sng" algn="ctr">
-                      <a:solidFill>
-                        <a:srgbClr val="EDF0F6"/>
-                      </a:solidFill>
-                      <a:prstDash val="solid"/>
-                      <a:round/>
-                      <a:headEnd type="none" w="med" len="med"/>
-                      <a:tailEnd type="none" w="med" len="med"/>
-                    </a:lnT>
-                    <a:lnB w="12700" cap="flat" cmpd="sng" algn="ctr">
-                      <a:solidFill>
-                        <a:srgbClr val="EDF0F6"/>
-                      </a:solidFill>
-                      <a:prstDash val="solid"/>
-                      <a:round/>
-                      <a:headEnd type="none" w="med" len="med"/>
-                      <a:tailEnd type="none" w="med" len="med"/>
-                    </a:lnB>
-                    <a:solidFill>
-                      <a:srgbClr val="F5F8FC"/>
-                    </a:solidFill>
-                  </a:tcPr>
-                </a:tc>
-              </a:tr>
             </a:tbl>
           </a:graphicData>
         </a:graphic>
@@ -20318,7 +18789,7 @@
         </p:nvSpPr>
         <p:spPr>
           <a:xfrm>
-            <a:off x="509321" y="6464808"/>
+            <a:off x="509321" y="5806440"/>
             <a:ext cx="64008" cy="502920"/>
           </a:xfrm>
           <a:prstGeom prst="rect">
@@ -20338,7 +18809,7 @@
         </p:nvSpPr>
         <p:spPr>
           <a:xfrm>
-            <a:off x="692201" y="6464808"/>
+            <a:off x="692201" y="5806440"/>
             <a:ext cx="13441680" cy="502920"/>
           </a:xfrm>
           <a:prstGeom prst="rect">
@@ -20675,16 +19146,16 @@
         </p:nvGraphicFramePr>
         <p:xfrm>
           <a:off x="509321" y="1737360"/>
-          <a:ext cx="9418320" cy="914400"/>
+          <a:ext cx="9326880" cy="914400"/>
         </p:xfrm>
         <a:graphic>
           <a:graphicData uri="http://schemas.openxmlformats.org/drawingml/2006/table">
             <a:tbl>
               <a:tblPr/>
               <a:tblGrid>
-                <a:gridCol w="2743200"/>
-                <a:gridCol w="4480560"/>
-                <a:gridCol w="2194560"/>
+                <a:gridCol w="2377440"/>
+                <a:gridCol w="3931920"/>
+                <a:gridCol w="3017520"/>
               </a:tblGrid>
               <a:tr h="457200">
                 <a:tc>
@@ -22346,12 +20817,12 @@
         </p:nvSpPr>
         <p:spPr>
           <a:xfrm>
-            <a:off x="10201961" y="1737360"/>
-            <a:ext cx="3931920" cy="4983480"/>
+            <a:off x="10110521" y="1737360"/>
+            <a:ext cx="4023360" cy="4983480"/>
           </a:xfrm>
           <a:prstGeom prst="roundRect">
             <a:avLst>
-              <a:gd name="adj" fmla="val 2326"/>
+              <a:gd name="adj" fmla="val 2273"/>
             </a:avLst>
           </a:prstGeom>
           <a:solidFill>
@@ -22403,7 +20874,7 @@
                 <a:ea typeface="Pretendard" pitchFamily="34" charset="-122"/>
                 <a:cs typeface="Pretendard" pitchFamily="34" charset="-120"/>
               </a:rPr>
-              <a:t>시간 예산: Local 45초, Global 90초, Hybrid 150초</a:t>
+              <a:t>시간 예산(초): Local 45, Global 90, Hybrid 150</a:t>
             </a:r>
             <a:endParaRPr lang="en-US" sz="2100" dirty="0"/>
           </a:p>
@@ -22424,7 +20895,7 @@
                 <a:ea typeface="Pretendard" pitchFamily="34" charset="-122"/>
                 <a:cs typeface="Pretendard" pitchFamily="34" charset="-120"/>
               </a:rPr>
-              <a:t>재시도 곱 상한: LLM 내부 2회(대기 10초 상한) × 노드 1회</a:t>
+              <a:t>재시도 곱 상한: LLM 2회 × 노드 1회, 대기는 10초까지</a:t>
             </a:r>
             <a:endParaRPr lang="en-US" sz="2100" dirty="0"/>
           </a:p>
@@ -22445,7 +20916,7 @@
                 <a:ea typeface="Pretendard" pitchFamily="34" charset="-122"/>
                 <a:cs typeface="Pretendard" pitchFamily="34" charset="-120"/>
               </a:rPr>
-              <a:t>동시성: LLM 전역 4개, Neo4j 세션 8개</a:t>
+              <a:t>동시성(전역): LLM 4개, Neo4j 세션 8개</a:t>
             </a:r>
             <a:endParaRPr lang="en-US" sz="2100" dirty="0"/>
           </a:p>
@@ -22603,7 +21074,7 @@
                 <a:ea typeface="Pretendard" pitchFamily="34" charset="-122"/>
                 <a:cs typeface="Pretendard" pitchFamily="34" charset="-120"/>
               </a:rPr>
-              <a:t>출처: 플로니 리뷰(2026-10-24), teacher/graphrag/v0/common.py</a:t>
+              <a:t>출처: 플로니 리뷰(2026-10-24), teacher/plan/graphrag-search-flow.md 7절</a:t>
             </a:r>
             <a:endParaRPr lang="en-US" sz="1400" dirty="0"/>
           </a:p>
